--- a/pdf/Roboterhaustier.pptx
+++ b/pdf/Roboterhaustier.pptx
@@ -5,10 +5,10 @@
     <p:sldMasterId id="2147483648" r:id="rId1"/>
   </p:sldMasterIdLst>
   <p:notesMasterIdLst>
-    <p:notesMasterId r:id="rId13"/>
+    <p:notesMasterId r:id="rId16"/>
   </p:notesMasterIdLst>
   <p:handoutMasterIdLst>
-    <p:handoutMasterId r:id="rId14"/>
+    <p:handoutMasterId r:id="rId17"/>
   </p:handoutMasterIdLst>
   <p:sldIdLst>
     <p:sldId id="256" r:id="rId2"/>
@@ -18,10 +18,13 @@
     <p:sldId id="261" r:id="rId6"/>
     <p:sldId id="335" r:id="rId7"/>
     <p:sldId id="385" r:id="rId8"/>
-    <p:sldId id="343" r:id="rId9"/>
-    <p:sldId id="286" r:id="rId10"/>
-    <p:sldId id="287" r:id="rId11"/>
-    <p:sldId id="288" r:id="rId12"/>
+    <p:sldId id="388" r:id="rId9"/>
+    <p:sldId id="387" r:id="rId10"/>
+    <p:sldId id="386" r:id="rId11"/>
+    <p:sldId id="343" r:id="rId12"/>
+    <p:sldId id="286" r:id="rId13"/>
+    <p:sldId id="287" r:id="rId14"/>
+    <p:sldId id="288" r:id="rId15"/>
   </p:sldIdLst>
   <p:sldSz cx="12192000" cy="6858000"/>
   <p:notesSz cx="6761163" cy="9942513"/>
@@ -222,7 +225,7 @@
           <a:p>
             <a:fld id="{725D9CB9-DD53-4B5A-BFEA-CC7D09232F8F}" type="datetimeFigureOut">
               <a:rPr lang="de-DE" smtClean="0"/>
-              <a:t>11.06.2024</a:t>
+              <a:t>21.06.2024</a:t>
             </a:fld>
             <a:endParaRPr lang="de-DE"/>
           </a:p>
@@ -387,7 +390,7 @@
           <a:p>
             <a:fld id="{78006F99-4802-45D8-926C-BC797F28FFA5}" type="datetimeFigureOut">
               <a:rPr lang="de-DE" smtClean="0"/>
-              <a:t>11.06.2024</a:t>
+              <a:t>21.06.2024</a:t>
             </a:fld>
             <a:endParaRPr lang="de-DE"/>
           </a:p>
@@ -786,7 +789,7 @@
           <a:p>
             <a:fld id="{A6FAC49D-ECDD-4F2C-8120-382570C1D824}" type="datetime1">
               <a:rPr lang="de-DE" smtClean="0"/>
-              <a:t>11.06.2024</a:t>
+              <a:t>21.06.2024</a:t>
             </a:fld>
             <a:endParaRPr lang="de-DE"/>
           </a:p>
@@ -956,7 +959,7 @@
           <a:p>
             <a:fld id="{E50C0A4B-13CC-45A2-8656-BAA48B2CEF29}" type="datetime1">
               <a:rPr lang="de-DE" smtClean="0"/>
-              <a:t>11.06.2024</a:t>
+              <a:t>21.06.2024</a:t>
             </a:fld>
             <a:endParaRPr lang="de-DE"/>
           </a:p>
@@ -1136,7 +1139,7 @@
           <a:p>
             <a:fld id="{2775FCF2-CA12-4DB8-B6E5-5001E6952446}" type="datetime1">
               <a:rPr lang="de-DE" smtClean="0"/>
-              <a:t>11.06.2024</a:t>
+              <a:t>21.06.2024</a:t>
             </a:fld>
             <a:endParaRPr lang="de-DE"/>
           </a:p>
@@ -1306,7 +1309,7 @@
           <a:p>
             <a:fld id="{925A2A14-E304-45CE-89EA-A90FA41C255E}" type="datetime1">
               <a:rPr lang="de-DE" smtClean="0"/>
-              <a:t>11.06.2024</a:t>
+              <a:t>21.06.2024</a:t>
             </a:fld>
             <a:endParaRPr lang="de-DE"/>
           </a:p>
@@ -1552,7 +1555,7 @@
           <a:p>
             <a:fld id="{7DC63D72-7320-429C-B303-DF07CE7A32F9}" type="datetime1">
               <a:rPr lang="de-DE" smtClean="0"/>
-              <a:t>11.06.2024</a:t>
+              <a:t>21.06.2024</a:t>
             </a:fld>
             <a:endParaRPr lang="de-DE"/>
           </a:p>
@@ -1784,7 +1787,7 @@
           <a:p>
             <a:fld id="{9182AFFB-E7C5-4130-85AA-7D4E20E1038D}" type="datetime1">
               <a:rPr lang="de-DE" smtClean="0"/>
-              <a:t>11.06.2024</a:t>
+              <a:t>21.06.2024</a:t>
             </a:fld>
             <a:endParaRPr lang="de-DE"/>
           </a:p>
@@ -2151,7 +2154,7 @@
           <a:p>
             <a:fld id="{7070F66C-6B69-4FCC-BFCA-6ED388B27025}" type="datetime1">
               <a:rPr lang="de-DE" smtClean="0"/>
-              <a:t>11.06.2024</a:t>
+              <a:t>21.06.2024</a:t>
             </a:fld>
             <a:endParaRPr lang="de-DE"/>
           </a:p>
@@ -2269,7 +2272,7 @@
           <a:p>
             <a:fld id="{B733A864-8391-4CCB-9894-41BBDB9EDB2E}" type="datetime1">
               <a:rPr lang="de-DE" smtClean="0"/>
-              <a:t>11.06.2024</a:t>
+              <a:t>21.06.2024</a:t>
             </a:fld>
             <a:endParaRPr lang="de-DE"/>
           </a:p>
@@ -2364,7 +2367,7 @@
           <a:p>
             <a:fld id="{7BE059A1-2812-426A-80C9-98BCCA31CA75}" type="datetime1">
               <a:rPr lang="de-DE" smtClean="0"/>
-              <a:t>11.06.2024</a:t>
+              <a:t>21.06.2024</a:t>
             </a:fld>
             <a:endParaRPr lang="de-DE"/>
           </a:p>
@@ -2641,7 +2644,7 @@
           <a:p>
             <a:fld id="{6F78F8F6-3BC5-43DE-B9AA-27F001652600}" type="datetime1">
               <a:rPr lang="de-DE" smtClean="0"/>
-              <a:t>11.06.2024</a:t>
+              <a:t>21.06.2024</a:t>
             </a:fld>
             <a:endParaRPr lang="de-DE"/>
           </a:p>
@@ -2894,7 +2897,7 @@
           <a:p>
             <a:fld id="{19C036CB-FB3D-4581-9159-35A00268442E}" type="datetime1">
               <a:rPr lang="de-DE" smtClean="0"/>
-              <a:t>11.06.2024</a:t>
+              <a:t>21.06.2024</a:t>
             </a:fld>
             <a:endParaRPr lang="de-DE"/>
           </a:p>
@@ -3107,7 +3110,7 @@
           <a:p>
             <a:fld id="{C239A2C5-0432-4692-819C-A358E2279F61}" type="datetime1">
               <a:rPr lang="de-DE" smtClean="0"/>
-              <a:t>11.06.2024</a:t>
+              <a:t>21.06.2024</a:t>
             </a:fld>
             <a:endParaRPr lang="de-DE"/>
           </a:p>
@@ -3728,10 +3731,6 @@
               </a:rPr>
               <a:t>Roboterhaustier</a:t>
             </a:r>
-            <a:endParaRPr lang="de-DE" b="1" dirty="0">
-              <a:latin typeface="Arial" panose="020B0604020202020204" pitchFamily="34" charset="0"/>
-              <a:cs typeface="Arial" panose="020B0604020202020204" pitchFamily="34" charset="0"/>
-            </a:endParaRPr>
           </a:p>
         </p:txBody>
       </p:sp>
@@ -3767,7 +3766,7 @@
       </p:pic>
       <p:sp>
         <p:nvSpPr>
-          <p:cNvPr id="5" name="Foliennummernplatzhalter 4"/>
+          <p:cNvPr id="4" name="Foliennummernplatzhalter 3"/>
           <p:cNvSpPr>
             <a:spLocks noGrp="1"/>
           </p:cNvSpPr>
@@ -3788,6 +3787,30 @@
           </a:p>
         </p:txBody>
       </p:sp>
+      <p:pic>
+        <p:nvPicPr>
+          <p:cNvPr id="3" name="Grafik 2"/>
+          <p:cNvPicPr>
+            <a:picLocks noChangeAspect="1"/>
+          </p:cNvPicPr>
+          <p:nvPr/>
+        </p:nvPicPr>
+        <p:blipFill>
+          <a:blip r:embed="rId3"/>
+          <a:stretch>
+            <a:fillRect/>
+          </a:stretch>
+        </p:blipFill>
+        <p:spPr>
+          <a:xfrm>
+            <a:off x="2619375" y="1795533"/>
+            <a:ext cx="6800850" cy="4210050"/>
+          </a:xfrm>
+          <a:prstGeom prst="rect">
+            <a:avLst/>
+          </a:prstGeom>
+        </p:spPr>
+      </p:pic>
       <p:sp>
         <p:nvSpPr>
           <p:cNvPr id="11" name="Rechteck 10"/>
@@ -3796,8 +3819,8 @@
         </p:nvSpPr>
         <p:spPr>
           <a:xfrm>
-            <a:off x="436019" y="1956268"/>
-            <a:ext cx="2133918" cy="772712"/>
+            <a:off x="4293537" y="1892625"/>
+            <a:ext cx="3172663" cy="1186607"/>
           </a:xfrm>
           <a:prstGeom prst="rect">
             <a:avLst/>
@@ -3823,7 +3846,7 @@
                 <a:ea typeface="Calibri" panose="020F0502020204030204" pitchFamily="34" charset="0"/>
                 <a:cs typeface="Times New Roman" panose="02020603050405020304" pitchFamily="18" charset="0"/>
               </a:rPr>
-              <a:t>Batteriehalter</a:t>
+              <a:t>Montiere den Exzenter </a:t>
             </a:r>
           </a:p>
           <a:p>
@@ -3837,15 +3860,31 @@
             </a:pPr>
             <a:r>
               <a:rPr lang="de-DE" b="1" dirty="0" smtClean="0">
-                <a:effectLst/>
                 <a:latin typeface="Arial" panose="020B0604020202020204" pitchFamily="34" charset="0"/>
                 <a:ea typeface="Calibri" panose="020F0502020204030204" pitchFamily="34" charset="0"/>
                 <a:cs typeface="Times New Roman" panose="02020603050405020304" pitchFamily="18" charset="0"/>
               </a:rPr>
-              <a:t>einsetzten</a:t>
+              <a:t>um 180° versetzt an </a:t>
+            </a:r>
+          </a:p>
+          <a:p>
+            <a:pPr marL="457200" algn="ctr">
+              <a:lnSpc>
+                <a:spcPct val="107000"/>
+              </a:lnSpc>
+              <a:spcAft>
+                <a:spcPts val="800"/>
+              </a:spcAft>
+            </a:pPr>
+            <a:r>
+              <a:rPr lang="de-DE" b="1" dirty="0" smtClean="0">
+                <a:latin typeface="Arial" panose="020B0604020202020204" pitchFamily="34" charset="0"/>
+                <a:ea typeface="Calibri" panose="020F0502020204030204" pitchFamily="34" charset="0"/>
+                <a:cs typeface="Times New Roman" panose="02020603050405020304" pitchFamily="18" charset="0"/>
+              </a:rPr>
+              <a:t>den Motor</a:t>
             </a:r>
             <a:endParaRPr lang="de-DE" dirty="0">
-              <a:effectLst/>
               <a:latin typeface="Calibri" panose="020F0502020204030204" pitchFamily="34" charset="0"/>
               <a:ea typeface="Calibri" panose="020F0502020204030204" pitchFamily="34" charset="0"/>
               <a:cs typeface="Times New Roman" panose="02020603050405020304" pitchFamily="18" charset="0"/>
@@ -3853,43 +3892,82 @@
           </a:p>
         </p:txBody>
       </p:sp>
-      <p:pic>
-        <p:nvPicPr>
-          <p:cNvPr id="16" name="Grafik 15"/>
-          <p:cNvPicPr/>
+      <p:cxnSp>
+        <p:nvCxnSpPr>
+          <p:cNvPr id="12" name="Gerade Verbindung mit Pfeil 11"/>
+          <p:cNvCxnSpPr/>
           <p:nvPr/>
-        </p:nvPicPr>
-        <p:blipFill>
-          <a:blip r:embed="rId3">
-            <a:extLst>
-              <a:ext uri="{28A0092B-C50C-407E-A947-70E740481C1C}">
-                <a14:useLocalDpi xmlns:a14="http://schemas.microsoft.com/office/drawing/2010/main" val="0"/>
-              </a:ext>
-            </a:extLst>
-          </a:blip>
-          <a:srcRect/>
-          <a:stretch>
-            <a:fillRect/>
-          </a:stretch>
-        </p:blipFill>
-        <p:spPr bwMode="auto">
-          <a:xfrm>
-            <a:off x="3495675" y="1205346"/>
-            <a:ext cx="5029200" cy="5295902"/>
-          </a:xfrm>
-          <a:prstGeom prst="rect">
+        </p:nvCxnSpPr>
+        <p:spPr>
+          <a:xfrm>
+            <a:off x="6034980" y="3079232"/>
+            <a:ext cx="1299270" cy="940297"/>
+          </a:xfrm>
+          <a:prstGeom prst="straightConnector1">
             <a:avLst/>
           </a:prstGeom>
-          <a:noFill/>
-          <a:ln>
-            <a:noFill/>
+          <a:ln w="44450">
+            <a:solidFill>
+              <a:srgbClr val="FF0000"/>
+            </a:solidFill>
+            <a:tailEnd type="triangle"/>
           </a:ln>
         </p:spPr>
-      </p:pic>
+        <p:style>
+          <a:lnRef idx="1">
+            <a:schemeClr val="accent1"/>
+          </a:lnRef>
+          <a:fillRef idx="0">
+            <a:schemeClr val="accent1"/>
+          </a:fillRef>
+          <a:effectRef idx="0">
+            <a:schemeClr val="accent1"/>
+          </a:effectRef>
+          <a:fontRef idx="minor">
+            <a:schemeClr val="tx1"/>
+          </a:fontRef>
+        </p:style>
+      </p:cxnSp>
+      <p:cxnSp>
+        <p:nvCxnSpPr>
+          <p:cNvPr id="13" name="Gerade Verbindung mit Pfeil 12"/>
+          <p:cNvCxnSpPr/>
+          <p:nvPr/>
+        </p:nvCxnSpPr>
+        <p:spPr>
+          <a:xfrm flipH="1">
+            <a:off x="4448176" y="3074459"/>
+            <a:ext cx="1431692" cy="806141"/>
+          </a:xfrm>
+          <a:prstGeom prst="straightConnector1">
+            <a:avLst/>
+          </a:prstGeom>
+          <a:ln w="44450">
+            <a:solidFill>
+              <a:srgbClr val="FF0000"/>
+            </a:solidFill>
+            <a:tailEnd type="triangle"/>
+          </a:ln>
+        </p:spPr>
+        <p:style>
+          <a:lnRef idx="1">
+            <a:schemeClr val="accent1"/>
+          </a:lnRef>
+          <a:fillRef idx="0">
+            <a:schemeClr val="accent1"/>
+          </a:fillRef>
+          <a:effectRef idx="0">
+            <a:schemeClr val="accent1"/>
+          </a:effectRef>
+          <a:fontRef idx="minor">
+            <a:schemeClr val="tx1"/>
+          </a:fontRef>
+        </p:style>
+      </p:cxnSp>
     </p:spTree>
     <p:extLst>
       <p:ext uri="{BB962C8B-B14F-4D97-AF65-F5344CB8AC3E}">
-        <p14:creationId xmlns:p14="http://schemas.microsoft.com/office/powerpoint/2010/main" val="4215014603"/>
+        <p14:creationId xmlns:p14="http://schemas.microsoft.com/office/powerpoint/2010/main" val="3360383488"/>
       </p:ext>
     </p:extLst>
   </p:cSld>
@@ -3950,10 +4028,6 @@
               </a:rPr>
               <a:t>Roboterhaustier</a:t>
             </a:r>
-            <a:endParaRPr lang="de-DE" b="1" dirty="0">
-              <a:latin typeface="Arial" panose="020B0604020202020204" pitchFamily="34" charset="0"/>
-              <a:cs typeface="Arial" panose="020B0604020202020204" pitchFamily="34" charset="0"/>
-            </a:endParaRPr>
           </a:p>
         </p:txBody>
       </p:sp>
@@ -4012,6 +4086,629 @@
       </p:sp>
       <p:sp>
         <p:nvSpPr>
+          <p:cNvPr id="15" name="Rechteck 14"/>
+          <p:cNvSpPr/>
+          <p:nvPr/>
+        </p:nvSpPr>
+        <p:spPr>
+          <a:xfrm>
+            <a:off x="676275" y="1956268"/>
+            <a:ext cx="2159566" cy="369332"/>
+          </a:xfrm>
+          <a:prstGeom prst="rect">
+            <a:avLst/>
+          </a:prstGeom>
+        </p:spPr>
+        <p:txBody>
+          <a:bodyPr wrap="none">
+            <a:spAutoFit/>
+          </a:bodyPr>
+          <a:lstStyle/>
+          <a:p>
+            <a:r>
+              <a:rPr lang="de-DE" b="1" dirty="0" smtClean="0">
+                <a:latin typeface="Arial" panose="020B0604020202020204" pitchFamily="34" charset="0"/>
+                <a:cs typeface="Arial" panose="020B0604020202020204" pitchFamily="34" charset="0"/>
+              </a:rPr>
+              <a:t>Montiere die Füße</a:t>
+            </a:r>
+            <a:endParaRPr lang="de-DE" dirty="0">
+              <a:latin typeface="Arial" panose="020B0604020202020204" pitchFamily="34" charset="0"/>
+              <a:cs typeface="Arial" panose="020B0604020202020204" pitchFamily="34" charset="0"/>
+            </a:endParaRPr>
+          </a:p>
+        </p:txBody>
+      </p:sp>
+      <p:pic>
+        <p:nvPicPr>
+          <p:cNvPr id="16" name="Grafik 15"/>
+          <p:cNvPicPr>
+            <a:picLocks noChangeAspect="1"/>
+          </p:cNvPicPr>
+          <p:nvPr/>
+        </p:nvPicPr>
+        <p:blipFill>
+          <a:blip r:embed="rId3"/>
+          <a:stretch>
+            <a:fillRect/>
+          </a:stretch>
+        </p:blipFill>
+        <p:spPr>
+          <a:xfrm>
+            <a:off x="3033712" y="1205346"/>
+            <a:ext cx="7096125" cy="5191125"/>
+          </a:xfrm>
+          <a:prstGeom prst="rect">
+            <a:avLst/>
+          </a:prstGeom>
+        </p:spPr>
+      </p:pic>
+    </p:spTree>
+    <p:extLst>
+      <p:ext uri="{BB962C8B-B14F-4D97-AF65-F5344CB8AC3E}">
+        <p14:creationId xmlns:p14="http://schemas.microsoft.com/office/powerpoint/2010/main" val="921904311"/>
+      </p:ext>
+    </p:extLst>
+  </p:cSld>
+  <p:clrMapOvr>
+    <a:masterClrMapping/>
+  </p:clrMapOvr>
+  <p:timing>
+    <p:tnLst>
+      <p:par>
+        <p:cTn id="1" dur="indefinite" restart="never" nodeType="tmRoot"/>
+      </p:par>
+    </p:tnLst>
+  </p:timing>
+</p:sld>
+</file>
+
+<file path=ppt/slides/slide12.xml><?xml version="1.0" encoding="utf-8"?>
+<p:sld xmlns:a="http://schemas.openxmlformats.org/drawingml/2006/main" xmlns:r="http://schemas.openxmlformats.org/officeDocument/2006/relationships" xmlns:p="http://schemas.openxmlformats.org/presentationml/2006/main">
+  <p:cSld>
+    <p:spTree>
+      <p:nvGrpSpPr>
+        <p:cNvPr id="1" name=""/>
+        <p:cNvGrpSpPr/>
+        <p:nvPr/>
+      </p:nvGrpSpPr>
+      <p:grpSpPr>
+        <a:xfrm>
+          <a:off x="0" y="0"/>
+          <a:ext cx="0" cy="0"/>
+          <a:chOff x="0" y="0"/>
+          <a:chExt cx="0" cy="0"/>
+        </a:xfrm>
+      </p:grpSpPr>
+      <p:sp>
+        <p:nvSpPr>
+          <p:cNvPr id="8" name="Untertitel 2"/>
+          <p:cNvSpPr>
+            <a:spLocks noGrp="1"/>
+          </p:cNvSpPr>
+          <p:nvPr>
+            <p:ph type="subTitle" idx="1"/>
+          </p:nvPr>
+        </p:nvSpPr>
+        <p:spPr>
+          <a:xfrm>
+            <a:off x="1307869" y="598516"/>
+            <a:ext cx="9144000" cy="806335"/>
+          </a:xfrm>
+        </p:spPr>
+        <p:txBody>
+          <a:bodyPr/>
+          <a:lstStyle/>
+          <a:p>
+            <a:r>
+              <a:rPr lang="de-DE" b="1" dirty="0">
+                <a:latin typeface="Arial" panose="020B0604020202020204" pitchFamily="34" charset="0"/>
+                <a:cs typeface="Arial" panose="020B0604020202020204" pitchFamily="34" charset="0"/>
+              </a:rPr>
+              <a:t>Roboterhaustier</a:t>
+            </a:r>
+          </a:p>
+        </p:txBody>
+      </p:sp>
+      <p:pic>
+        <p:nvPicPr>
+          <p:cNvPr id="9" name="Grafik 8"/>
+          <p:cNvPicPr>
+            <a:picLocks noChangeAspect="1"/>
+          </p:cNvPicPr>
+          <p:nvPr/>
+        </p:nvPicPr>
+        <p:blipFill>
+          <a:blip r:embed="rId2" cstate="print">
+            <a:extLst>
+              <a:ext uri="{28A0092B-C50C-407E-A947-70E740481C1C}">
+                <a14:useLocalDpi xmlns:a14="http://schemas.microsoft.com/office/drawing/2010/main" val="0"/>
+              </a:ext>
+            </a:extLst>
+          </a:blip>
+          <a:stretch>
+            <a:fillRect/>
+          </a:stretch>
+        </p:blipFill>
+        <p:spPr>
+          <a:xfrm>
+            <a:off x="10365377" y="598516"/>
+            <a:ext cx="1519646" cy="606830"/>
+          </a:xfrm>
+          <a:prstGeom prst="rect">
+            <a:avLst/>
+          </a:prstGeom>
+        </p:spPr>
+      </p:pic>
+      <p:sp>
+        <p:nvSpPr>
+          <p:cNvPr id="7" name="Foliennummernplatzhalter 6"/>
+          <p:cNvSpPr>
+            <a:spLocks noGrp="1"/>
+          </p:cNvSpPr>
+          <p:nvPr>
+            <p:ph type="sldNum" sz="quarter" idx="12"/>
+          </p:nvPr>
+        </p:nvSpPr>
+        <p:spPr/>
+        <p:txBody>
+          <a:bodyPr/>
+          <a:lstStyle/>
+          <a:p>
+            <a:fld id="{EFB163D5-C478-46E9-A5B4-54710F846912}" type="slidenum">
+              <a:rPr lang="de-DE" smtClean="0"/>
+              <a:t>12</a:t>
+            </a:fld>
+            <a:endParaRPr lang="de-DE"/>
+          </a:p>
+        </p:txBody>
+      </p:sp>
+      <p:pic>
+        <p:nvPicPr>
+          <p:cNvPr id="14" name="Grafik 13"/>
+          <p:cNvPicPr/>
+          <p:nvPr/>
+        </p:nvPicPr>
+        <p:blipFill>
+          <a:blip r:embed="rId3">
+            <a:extLst>
+              <a:ext uri="{28A0092B-C50C-407E-A947-70E740481C1C}">
+                <a14:useLocalDpi xmlns:a14="http://schemas.microsoft.com/office/drawing/2010/main" val="0"/>
+              </a:ext>
+            </a:extLst>
+          </a:blip>
+          <a:srcRect/>
+          <a:stretch>
+            <a:fillRect/>
+          </a:stretch>
+        </p:blipFill>
+        <p:spPr bwMode="auto">
+          <a:xfrm>
+            <a:off x="3136833" y="1086444"/>
+            <a:ext cx="5486071" cy="5588314"/>
+          </a:xfrm>
+          <a:prstGeom prst="rect">
+            <a:avLst/>
+          </a:prstGeom>
+          <a:noFill/>
+          <a:ln>
+            <a:noFill/>
+          </a:ln>
+        </p:spPr>
+      </p:pic>
+      <p:sp>
+        <p:nvSpPr>
+          <p:cNvPr id="15" name="Rechteck 14"/>
+          <p:cNvSpPr/>
+          <p:nvPr/>
+        </p:nvSpPr>
+        <p:spPr>
+          <a:xfrm>
+            <a:off x="480901" y="1956268"/>
+            <a:ext cx="2044149" cy="772712"/>
+          </a:xfrm>
+          <a:prstGeom prst="rect">
+            <a:avLst/>
+          </a:prstGeom>
+        </p:spPr>
+        <p:txBody>
+          <a:bodyPr wrap="none">
+            <a:spAutoFit/>
+          </a:bodyPr>
+          <a:lstStyle/>
+          <a:p>
+            <a:pPr marL="457200" algn="ctr">
+              <a:lnSpc>
+                <a:spcPct val="107000"/>
+              </a:lnSpc>
+              <a:spcAft>
+                <a:spcPts val="800"/>
+              </a:spcAft>
+            </a:pPr>
+            <a:r>
+              <a:rPr lang="de-DE" b="1" dirty="0" smtClean="0">
+                <a:latin typeface="Arial" panose="020B0604020202020204" pitchFamily="34" charset="0"/>
+                <a:ea typeface="Calibri" panose="020F0502020204030204" pitchFamily="34" charset="0"/>
+                <a:cs typeface="Times New Roman" panose="02020603050405020304" pitchFamily="18" charset="0"/>
+              </a:rPr>
+              <a:t>Endmontage</a:t>
+            </a:r>
+          </a:p>
+          <a:p>
+            <a:pPr marL="457200" algn="ctr">
+              <a:lnSpc>
+                <a:spcPct val="107000"/>
+              </a:lnSpc>
+              <a:spcAft>
+                <a:spcPts val="800"/>
+              </a:spcAft>
+            </a:pPr>
+            <a:r>
+              <a:rPr lang="de-DE" b="1" dirty="0" smtClean="0">
+                <a:effectLst/>
+                <a:latin typeface="Arial" panose="020B0604020202020204" pitchFamily="34" charset="0"/>
+                <a:ea typeface="Calibri" panose="020F0502020204030204" pitchFamily="34" charset="0"/>
+                <a:cs typeface="Times New Roman" panose="02020603050405020304" pitchFamily="18" charset="0"/>
+              </a:rPr>
+              <a:t>der Beine</a:t>
+            </a:r>
+            <a:endParaRPr lang="de-DE" dirty="0">
+              <a:effectLst/>
+              <a:latin typeface="Calibri" panose="020F0502020204030204" pitchFamily="34" charset="0"/>
+              <a:ea typeface="Calibri" panose="020F0502020204030204" pitchFamily="34" charset="0"/>
+              <a:cs typeface="Times New Roman" panose="02020603050405020304" pitchFamily="18" charset="0"/>
+            </a:endParaRPr>
+          </a:p>
+        </p:txBody>
+      </p:sp>
+    </p:spTree>
+    <p:extLst>
+      <p:ext uri="{BB962C8B-B14F-4D97-AF65-F5344CB8AC3E}">
+        <p14:creationId xmlns:p14="http://schemas.microsoft.com/office/powerpoint/2010/main" val="300629078"/>
+      </p:ext>
+    </p:extLst>
+  </p:cSld>
+  <p:clrMapOvr>
+    <a:masterClrMapping/>
+  </p:clrMapOvr>
+  <p:timing>
+    <p:tnLst>
+      <p:par>
+        <p:cTn id="1" dur="indefinite" restart="never" nodeType="tmRoot"/>
+      </p:par>
+    </p:tnLst>
+  </p:timing>
+</p:sld>
+</file>
+
+<file path=ppt/slides/slide13.xml><?xml version="1.0" encoding="utf-8"?>
+<p:sld xmlns:a="http://schemas.openxmlformats.org/drawingml/2006/main" xmlns:r="http://schemas.openxmlformats.org/officeDocument/2006/relationships" xmlns:p="http://schemas.openxmlformats.org/presentationml/2006/main">
+  <p:cSld>
+    <p:spTree>
+      <p:nvGrpSpPr>
+        <p:cNvPr id="1" name=""/>
+        <p:cNvGrpSpPr/>
+        <p:nvPr/>
+      </p:nvGrpSpPr>
+      <p:grpSpPr>
+        <a:xfrm>
+          <a:off x="0" y="0"/>
+          <a:ext cx="0" cy="0"/>
+          <a:chOff x="0" y="0"/>
+          <a:chExt cx="0" cy="0"/>
+        </a:xfrm>
+      </p:grpSpPr>
+      <p:sp>
+        <p:nvSpPr>
+          <p:cNvPr id="8" name="Untertitel 2"/>
+          <p:cNvSpPr>
+            <a:spLocks noGrp="1"/>
+          </p:cNvSpPr>
+          <p:nvPr>
+            <p:ph type="subTitle" idx="1"/>
+          </p:nvPr>
+        </p:nvSpPr>
+        <p:spPr>
+          <a:xfrm>
+            <a:off x="1307869" y="598516"/>
+            <a:ext cx="9144000" cy="806335"/>
+          </a:xfrm>
+        </p:spPr>
+        <p:txBody>
+          <a:bodyPr/>
+          <a:lstStyle/>
+          <a:p>
+            <a:r>
+              <a:rPr lang="de-DE" b="1" dirty="0">
+                <a:latin typeface="Arial" panose="020B0604020202020204" pitchFamily="34" charset="0"/>
+                <a:cs typeface="Arial" panose="020B0604020202020204" pitchFamily="34" charset="0"/>
+              </a:rPr>
+              <a:t>Roboterhaustier</a:t>
+            </a:r>
+          </a:p>
+        </p:txBody>
+      </p:sp>
+      <p:pic>
+        <p:nvPicPr>
+          <p:cNvPr id="9" name="Grafik 8"/>
+          <p:cNvPicPr>
+            <a:picLocks noChangeAspect="1"/>
+          </p:cNvPicPr>
+          <p:nvPr/>
+        </p:nvPicPr>
+        <p:blipFill>
+          <a:blip r:embed="rId2" cstate="print">
+            <a:extLst>
+              <a:ext uri="{28A0092B-C50C-407E-A947-70E740481C1C}">
+                <a14:useLocalDpi xmlns:a14="http://schemas.microsoft.com/office/drawing/2010/main" val="0"/>
+              </a:ext>
+            </a:extLst>
+          </a:blip>
+          <a:stretch>
+            <a:fillRect/>
+          </a:stretch>
+        </p:blipFill>
+        <p:spPr>
+          <a:xfrm>
+            <a:off x="10365377" y="598516"/>
+            <a:ext cx="1519646" cy="606830"/>
+          </a:xfrm>
+          <a:prstGeom prst="rect">
+            <a:avLst/>
+          </a:prstGeom>
+        </p:spPr>
+      </p:pic>
+      <p:sp>
+        <p:nvSpPr>
+          <p:cNvPr id="5" name="Foliennummernplatzhalter 4"/>
+          <p:cNvSpPr>
+            <a:spLocks noGrp="1"/>
+          </p:cNvSpPr>
+          <p:nvPr>
+            <p:ph type="sldNum" sz="quarter" idx="12"/>
+          </p:nvPr>
+        </p:nvSpPr>
+        <p:spPr/>
+        <p:txBody>
+          <a:bodyPr/>
+          <a:lstStyle/>
+          <a:p>
+            <a:fld id="{EFB163D5-C478-46E9-A5B4-54710F846912}" type="slidenum">
+              <a:rPr lang="de-DE" smtClean="0"/>
+              <a:t>13</a:t>
+            </a:fld>
+            <a:endParaRPr lang="de-DE"/>
+          </a:p>
+        </p:txBody>
+      </p:sp>
+      <p:sp>
+        <p:nvSpPr>
+          <p:cNvPr id="11" name="Rechteck 10"/>
+          <p:cNvSpPr/>
+          <p:nvPr/>
+        </p:nvSpPr>
+        <p:spPr>
+          <a:xfrm>
+            <a:off x="121696" y="1984843"/>
+            <a:ext cx="3212054" cy="787652"/>
+          </a:xfrm>
+          <a:prstGeom prst="rect">
+            <a:avLst/>
+          </a:prstGeom>
+        </p:spPr>
+        <p:txBody>
+          <a:bodyPr wrap="square">
+            <a:spAutoFit/>
+          </a:bodyPr>
+          <a:lstStyle/>
+          <a:p>
+            <a:pPr marL="457200" algn="ctr">
+              <a:lnSpc>
+                <a:spcPct val="107000"/>
+              </a:lnSpc>
+              <a:spcAft>
+                <a:spcPts val="800"/>
+              </a:spcAft>
+            </a:pPr>
+            <a:r>
+              <a:rPr lang="de-DE" b="1" dirty="0" smtClean="0">
+                <a:latin typeface="Arial" panose="020B0604020202020204" pitchFamily="34" charset="0"/>
+                <a:ea typeface="Calibri" panose="020F0502020204030204" pitchFamily="34" charset="0"/>
+                <a:cs typeface="Times New Roman" panose="02020603050405020304" pitchFamily="18" charset="0"/>
+              </a:rPr>
+              <a:t>Setze den </a:t>
+            </a:r>
+          </a:p>
+          <a:p>
+            <a:pPr marL="457200" algn="ctr">
+              <a:lnSpc>
+                <a:spcPct val="107000"/>
+              </a:lnSpc>
+              <a:spcAft>
+                <a:spcPts val="800"/>
+              </a:spcAft>
+            </a:pPr>
+            <a:r>
+              <a:rPr lang="de-DE" b="1" dirty="0" smtClean="0">
+                <a:latin typeface="Arial" panose="020B0604020202020204" pitchFamily="34" charset="0"/>
+                <a:ea typeface="Calibri" panose="020F0502020204030204" pitchFamily="34" charset="0"/>
+                <a:cs typeface="Times New Roman" panose="02020603050405020304" pitchFamily="18" charset="0"/>
+              </a:rPr>
+              <a:t>Batteriehalter </a:t>
+            </a:r>
+            <a:r>
+              <a:rPr lang="de-DE" b="1" dirty="0" smtClean="0">
+                <a:effectLst/>
+                <a:latin typeface="Arial" panose="020B0604020202020204" pitchFamily="34" charset="0"/>
+                <a:ea typeface="Calibri" panose="020F0502020204030204" pitchFamily="34" charset="0"/>
+                <a:cs typeface="Times New Roman" panose="02020603050405020304" pitchFamily="18" charset="0"/>
+              </a:rPr>
+              <a:t>ein</a:t>
+            </a:r>
+            <a:endParaRPr lang="de-DE" dirty="0">
+              <a:effectLst/>
+              <a:latin typeface="Calibri" panose="020F0502020204030204" pitchFamily="34" charset="0"/>
+              <a:ea typeface="Calibri" panose="020F0502020204030204" pitchFamily="34" charset="0"/>
+              <a:cs typeface="Times New Roman" panose="02020603050405020304" pitchFamily="18" charset="0"/>
+            </a:endParaRPr>
+          </a:p>
+        </p:txBody>
+      </p:sp>
+      <p:pic>
+        <p:nvPicPr>
+          <p:cNvPr id="16" name="Grafik 15"/>
+          <p:cNvPicPr/>
+          <p:nvPr/>
+        </p:nvPicPr>
+        <p:blipFill>
+          <a:blip r:embed="rId3">
+            <a:extLst>
+              <a:ext uri="{28A0092B-C50C-407E-A947-70E740481C1C}">
+                <a14:useLocalDpi xmlns:a14="http://schemas.microsoft.com/office/drawing/2010/main" val="0"/>
+              </a:ext>
+            </a:extLst>
+          </a:blip>
+          <a:srcRect/>
+          <a:stretch>
+            <a:fillRect/>
+          </a:stretch>
+        </p:blipFill>
+        <p:spPr bwMode="auto">
+          <a:xfrm>
+            <a:off x="3495675" y="1205346"/>
+            <a:ext cx="5029200" cy="5295902"/>
+          </a:xfrm>
+          <a:prstGeom prst="rect">
+            <a:avLst/>
+          </a:prstGeom>
+          <a:noFill/>
+          <a:ln>
+            <a:noFill/>
+          </a:ln>
+        </p:spPr>
+      </p:pic>
+    </p:spTree>
+    <p:extLst>
+      <p:ext uri="{BB962C8B-B14F-4D97-AF65-F5344CB8AC3E}">
+        <p14:creationId xmlns:p14="http://schemas.microsoft.com/office/powerpoint/2010/main" val="4215014603"/>
+      </p:ext>
+    </p:extLst>
+  </p:cSld>
+  <p:clrMapOvr>
+    <a:masterClrMapping/>
+  </p:clrMapOvr>
+  <p:timing>
+    <p:tnLst>
+      <p:par>
+        <p:cTn id="1" dur="indefinite" restart="never" nodeType="tmRoot"/>
+      </p:par>
+    </p:tnLst>
+  </p:timing>
+</p:sld>
+</file>
+
+<file path=ppt/slides/slide14.xml><?xml version="1.0" encoding="utf-8"?>
+<p:sld xmlns:a="http://schemas.openxmlformats.org/drawingml/2006/main" xmlns:r="http://schemas.openxmlformats.org/officeDocument/2006/relationships" xmlns:p="http://schemas.openxmlformats.org/presentationml/2006/main">
+  <p:cSld>
+    <p:spTree>
+      <p:nvGrpSpPr>
+        <p:cNvPr id="1" name=""/>
+        <p:cNvGrpSpPr/>
+        <p:nvPr/>
+      </p:nvGrpSpPr>
+      <p:grpSpPr>
+        <a:xfrm>
+          <a:off x="0" y="0"/>
+          <a:ext cx="0" cy="0"/>
+          <a:chOff x="0" y="0"/>
+          <a:chExt cx="0" cy="0"/>
+        </a:xfrm>
+      </p:grpSpPr>
+      <p:sp>
+        <p:nvSpPr>
+          <p:cNvPr id="8" name="Untertitel 2"/>
+          <p:cNvSpPr>
+            <a:spLocks noGrp="1"/>
+          </p:cNvSpPr>
+          <p:nvPr>
+            <p:ph type="subTitle" idx="1"/>
+          </p:nvPr>
+        </p:nvSpPr>
+        <p:spPr>
+          <a:xfrm>
+            <a:off x="1307869" y="598516"/>
+            <a:ext cx="9144000" cy="806335"/>
+          </a:xfrm>
+        </p:spPr>
+        <p:txBody>
+          <a:bodyPr/>
+          <a:lstStyle/>
+          <a:p>
+            <a:r>
+              <a:rPr lang="de-DE" b="1" dirty="0">
+                <a:latin typeface="Arial" panose="020B0604020202020204" pitchFamily="34" charset="0"/>
+                <a:cs typeface="Arial" panose="020B0604020202020204" pitchFamily="34" charset="0"/>
+              </a:rPr>
+              <a:t>Roboterhaustier</a:t>
+            </a:r>
+          </a:p>
+        </p:txBody>
+      </p:sp>
+      <p:pic>
+        <p:nvPicPr>
+          <p:cNvPr id="9" name="Grafik 8"/>
+          <p:cNvPicPr>
+            <a:picLocks noChangeAspect="1"/>
+          </p:cNvPicPr>
+          <p:nvPr/>
+        </p:nvPicPr>
+        <p:blipFill>
+          <a:blip r:embed="rId2" cstate="print">
+            <a:extLst>
+              <a:ext uri="{28A0092B-C50C-407E-A947-70E740481C1C}">
+                <a14:useLocalDpi xmlns:a14="http://schemas.microsoft.com/office/drawing/2010/main" val="0"/>
+              </a:ext>
+            </a:extLst>
+          </a:blip>
+          <a:stretch>
+            <a:fillRect/>
+          </a:stretch>
+        </p:blipFill>
+        <p:spPr>
+          <a:xfrm>
+            <a:off x="10365377" y="598516"/>
+            <a:ext cx="1519646" cy="606830"/>
+          </a:xfrm>
+          <a:prstGeom prst="rect">
+            <a:avLst/>
+          </a:prstGeom>
+        </p:spPr>
+      </p:pic>
+      <p:sp>
+        <p:nvSpPr>
+          <p:cNvPr id="5" name="Foliennummernplatzhalter 4"/>
+          <p:cNvSpPr>
+            <a:spLocks noGrp="1"/>
+          </p:cNvSpPr>
+          <p:nvPr>
+            <p:ph type="sldNum" sz="quarter" idx="12"/>
+          </p:nvPr>
+        </p:nvSpPr>
+        <p:spPr/>
+        <p:txBody>
+          <a:bodyPr/>
+          <a:lstStyle/>
+          <a:p>
+            <a:fld id="{EFB163D5-C478-46E9-A5B4-54710F846912}" type="slidenum">
+              <a:rPr lang="de-DE" smtClean="0"/>
+              <a:t>14</a:t>
+            </a:fld>
+            <a:endParaRPr lang="de-DE"/>
+          </a:p>
+        </p:txBody>
+      </p:sp>
+      <p:sp>
+        <p:nvSpPr>
           <p:cNvPr id="7" name="Rechteck 6"/>
           <p:cNvSpPr/>
           <p:nvPr/>
@@ -4169,8 +4866,8 @@
         </p:nvSpPr>
         <p:spPr>
           <a:xfrm>
-            <a:off x="8177338" y="4592762"/>
-            <a:ext cx="3108543" cy="787652"/>
+            <a:off x="8344050" y="4592762"/>
+            <a:ext cx="2775119" cy="787652"/>
           </a:xfrm>
           <a:prstGeom prst="rect">
             <a:avLst/>
@@ -4192,11 +4889,31 @@
             </a:pPr>
             <a:r>
               <a:rPr lang="de-DE" b="1" dirty="0" smtClean="0">
+                <a:solidFill>
+                  <a:srgbClr val="FF0000"/>
+                </a:solidFill>
                 <a:latin typeface="Arial" panose="020B0604020202020204" pitchFamily="34" charset="0"/>
                 <a:cs typeface="Arial" panose="020B0604020202020204" pitchFamily="34" charset="0"/>
               </a:rPr>
-              <a:t>Entsorge die Batterien</a:t>
-            </a:r>
+              <a:t>Entsorge </a:t>
+            </a:r>
+            <a:r>
+              <a:rPr lang="de-DE" b="1" dirty="0" smtClean="0">
+                <a:solidFill>
+                  <a:srgbClr val="FF0000"/>
+                </a:solidFill>
+                <a:latin typeface="Arial" panose="020B0604020202020204" pitchFamily="34" charset="0"/>
+                <a:cs typeface="Arial" panose="020B0604020202020204" pitchFamily="34" charset="0"/>
+              </a:rPr>
+              <a:t>Batterien</a:t>
+            </a:r>
+            <a:endParaRPr lang="de-DE" b="1" dirty="0" smtClean="0">
+              <a:solidFill>
+                <a:srgbClr val="FF0000"/>
+              </a:solidFill>
+              <a:latin typeface="Arial" panose="020B0604020202020204" pitchFamily="34" charset="0"/>
+              <a:cs typeface="Arial" panose="020B0604020202020204" pitchFamily="34" charset="0"/>
+            </a:endParaRPr>
           </a:p>
           <a:p>
             <a:pPr marL="457200" algn="ctr">
@@ -4209,14 +4926,32 @@
             </a:pPr>
             <a:r>
               <a:rPr lang="de-DE" b="1" dirty="0" smtClean="0">
+                <a:solidFill>
+                  <a:srgbClr val="FF0000"/>
+                </a:solidFill>
                 <a:effectLst/>
                 <a:latin typeface="Arial" panose="020B0604020202020204" pitchFamily="34" charset="0"/>
                 <a:ea typeface="Calibri" panose="020F0502020204030204" pitchFamily="34" charset="0"/>
                 <a:cs typeface="Arial" panose="020B0604020202020204" pitchFamily="34" charset="0"/>
               </a:rPr>
-              <a:t>Nicht im Hausmüll!</a:t>
+              <a:t>nicht </a:t>
+            </a:r>
+            <a:r>
+              <a:rPr lang="de-DE" b="1" dirty="0" smtClean="0">
+                <a:solidFill>
+                  <a:srgbClr val="FF0000"/>
+                </a:solidFill>
+                <a:effectLst/>
+                <a:latin typeface="Arial" panose="020B0604020202020204" pitchFamily="34" charset="0"/>
+                <a:ea typeface="Calibri" panose="020F0502020204030204" pitchFamily="34" charset="0"/>
+                <a:cs typeface="Arial" panose="020B0604020202020204" pitchFamily="34" charset="0"/>
+              </a:rPr>
+              <a:t>im Hausmüll!</a:t>
             </a:r>
             <a:endParaRPr lang="de-DE" dirty="0">
+              <a:solidFill>
+                <a:srgbClr val="FF0000"/>
+              </a:solidFill>
               <a:effectLst/>
               <a:latin typeface="Arial" panose="020B0604020202020204" pitchFamily="34" charset="0"/>
               <a:ea typeface="Calibri" panose="020F0502020204030204" pitchFamily="34" charset="0"/>
@@ -4289,10 +5024,6 @@
               </a:rPr>
               <a:t>Roboterhaustier</a:t>
             </a:r>
-            <a:endParaRPr lang="de-DE" b="1" dirty="0">
-              <a:latin typeface="Arial" panose="020B0604020202020204" pitchFamily="34" charset="0"/>
-              <a:cs typeface="Arial" panose="020B0604020202020204" pitchFamily="34" charset="0"/>
-            </a:endParaRPr>
           </a:p>
         </p:txBody>
       </p:sp>
@@ -4575,10 +5306,6 @@
               </a:rPr>
               <a:t>Roboterhaustier</a:t>
             </a:r>
-            <a:endParaRPr lang="de-DE" b="1" dirty="0">
-              <a:latin typeface="Arial" panose="020B0604020202020204" pitchFamily="34" charset="0"/>
-              <a:cs typeface="Arial" panose="020B0604020202020204" pitchFamily="34" charset="0"/>
-            </a:endParaRPr>
           </a:p>
         </p:txBody>
       </p:sp>
@@ -4732,10 +5459,6 @@
               </a:rPr>
               <a:t>Roboterhaustier</a:t>
             </a:r>
-            <a:endParaRPr lang="de-DE" b="1" dirty="0">
-              <a:latin typeface="Arial" panose="020B0604020202020204" pitchFamily="34" charset="0"/>
-              <a:cs typeface="Arial" panose="020B0604020202020204" pitchFamily="34" charset="0"/>
-            </a:endParaRPr>
           </a:p>
         </p:txBody>
       </p:sp>
@@ -4934,10 +5657,6 @@
               </a:rPr>
               <a:t>Roboterhaustier</a:t>
             </a:r>
-            <a:endParaRPr lang="de-DE" b="1" dirty="0">
-              <a:latin typeface="Arial" panose="020B0604020202020204" pitchFamily="34" charset="0"/>
-              <a:cs typeface="Arial" panose="020B0604020202020204" pitchFamily="34" charset="0"/>
-            </a:endParaRPr>
           </a:p>
         </p:txBody>
       </p:sp>
@@ -5137,10 +5856,6 @@
               </a:rPr>
               <a:t>Roboterhaustier</a:t>
             </a:r>
-            <a:endParaRPr lang="de-DE" b="1" dirty="0">
-              <a:latin typeface="Arial" panose="020B0604020202020204" pitchFamily="34" charset="0"/>
-              <a:cs typeface="Arial" panose="020B0604020202020204" pitchFamily="34" charset="0"/>
-            </a:endParaRPr>
           </a:p>
         </p:txBody>
       </p:sp>
@@ -5340,10 +6055,6 @@
               </a:rPr>
               <a:t>Roboterhaustier</a:t>
             </a:r>
-            <a:endParaRPr lang="de-DE" b="1" dirty="0">
-              <a:latin typeface="Arial" panose="020B0604020202020204" pitchFamily="34" charset="0"/>
-              <a:cs typeface="Arial" panose="020B0604020202020204" pitchFamily="34" charset="0"/>
-            </a:endParaRPr>
           </a:p>
         </p:txBody>
       </p:sp>
@@ -5400,39 +6111,6 @@
           </a:p>
         </p:txBody>
       </p:sp>
-      <p:pic>
-        <p:nvPicPr>
-          <p:cNvPr id="7" name="Grafik 6"/>
-          <p:cNvPicPr/>
-          <p:nvPr/>
-        </p:nvPicPr>
-        <p:blipFill>
-          <a:blip r:embed="rId3">
-            <a:extLst>
-              <a:ext uri="{28A0092B-C50C-407E-A947-70E740481C1C}">
-                <a14:useLocalDpi xmlns:a14="http://schemas.microsoft.com/office/drawing/2010/main" val="0"/>
-              </a:ext>
-            </a:extLst>
-          </a:blip>
-          <a:srcRect/>
-          <a:stretch>
-            <a:fillRect/>
-          </a:stretch>
-        </p:blipFill>
-        <p:spPr bwMode="auto">
-          <a:xfrm>
-            <a:off x="3675355" y="1404851"/>
-            <a:ext cx="5398660" cy="5175243"/>
-          </a:xfrm>
-          <a:prstGeom prst="rect">
-            <a:avLst/>
-          </a:prstGeom>
-          <a:noFill/>
-          <a:ln>
-            <a:noFill/>
-          </a:ln>
-        </p:spPr>
-      </p:pic>
       <p:sp>
         <p:nvSpPr>
           <p:cNvPr id="11" name="Rechteck 10"/>
@@ -5441,8 +6119,8 @@
         </p:nvSpPr>
         <p:spPr>
           <a:xfrm>
-            <a:off x="116197" y="1982901"/>
-            <a:ext cx="3856632" cy="787652"/>
+            <a:off x="665484" y="1982901"/>
+            <a:ext cx="2758063" cy="388696"/>
           </a:xfrm>
           <a:prstGeom prst="rect">
             <a:avLst/>
@@ -5463,22 +6141,89 @@
               </a:spcAft>
             </a:pPr>
             <a:r>
-              <a:rPr lang="de-DE" b="1" dirty="0">
-                <a:latin typeface="Arial" panose="020B0604020202020204" pitchFamily="34" charset="0"/>
-                <a:ea typeface="Calibri" panose="020F0502020204030204" pitchFamily="34" charset="0"/>
-                <a:cs typeface="Times New Roman" panose="02020603050405020304" pitchFamily="18" charset="0"/>
-              </a:rPr>
-              <a:t>Verwende die </a:t>
-            </a:r>
-            <a:r>
               <a:rPr lang="de-DE" b="1" dirty="0" smtClean="0">
                 <a:latin typeface="Arial" panose="020B0604020202020204" pitchFamily="34" charset="0"/>
                 <a:ea typeface="Calibri" panose="020F0502020204030204" pitchFamily="34" charset="0"/>
                 <a:cs typeface="Times New Roman" panose="02020603050405020304" pitchFamily="18" charset="0"/>
               </a:rPr>
-              <a:t>Abstandshalter</a:t>
-            </a:r>
-          </a:p>
+              <a:t>Verklebe die 3 Teile</a:t>
+            </a:r>
+            <a:endParaRPr lang="de-DE" dirty="0">
+              <a:latin typeface="Calibri" panose="020F0502020204030204" pitchFamily="34" charset="0"/>
+              <a:ea typeface="Calibri" panose="020F0502020204030204" pitchFamily="34" charset="0"/>
+              <a:cs typeface="Times New Roman" panose="02020603050405020304" pitchFamily="18" charset="0"/>
+            </a:endParaRPr>
+          </a:p>
+        </p:txBody>
+      </p:sp>
+      <p:pic>
+        <p:nvPicPr>
+          <p:cNvPr id="2" name="Grafik 1"/>
+          <p:cNvPicPr>
+            <a:picLocks noChangeAspect="1"/>
+          </p:cNvPicPr>
+          <p:nvPr/>
+        </p:nvPicPr>
+        <p:blipFill>
+          <a:blip r:embed="rId3"/>
+          <a:stretch>
+            <a:fillRect/>
+          </a:stretch>
+        </p:blipFill>
+        <p:spPr>
+          <a:xfrm>
+            <a:off x="1435889" y="3368017"/>
+            <a:ext cx="3496470" cy="2110564"/>
+          </a:xfrm>
+          <a:prstGeom prst="rect">
+            <a:avLst/>
+          </a:prstGeom>
+        </p:spPr>
+      </p:pic>
+      <p:pic>
+        <p:nvPicPr>
+          <p:cNvPr id="3" name="Grafik 2"/>
+          <p:cNvPicPr>
+            <a:picLocks noChangeAspect="1"/>
+          </p:cNvPicPr>
+          <p:nvPr/>
+        </p:nvPicPr>
+        <p:blipFill>
+          <a:blip r:embed="rId4"/>
+          <a:stretch>
+            <a:fillRect/>
+          </a:stretch>
+        </p:blipFill>
+        <p:spPr>
+          <a:xfrm>
+            <a:off x="6320899" y="1618038"/>
+            <a:ext cx="3430665" cy="4325621"/>
+          </a:xfrm>
+          <a:prstGeom prst="rect">
+            <a:avLst/>
+          </a:prstGeom>
+        </p:spPr>
+      </p:pic>
+      <p:sp>
+        <p:nvSpPr>
+          <p:cNvPr id="13" name="Rechteck 12"/>
+          <p:cNvSpPr/>
+          <p:nvPr/>
+        </p:nvSpPr>
+        <p:spPr>
+          <a:xfrm>
+            <a:off x="8997053" y="2329429"/>
+            <a:ext cx="2736647" cy="787652"/>
+          </a:xfrm>
+          <a:prstGeom prst="rect">
+            <a:avLst/>
+          </a:prstGeom>
+        </p:spPr>
+        <p:txBody>
+          <a:bodyPr wrap="none">
+            <a:spAutoFit/>
+          </a:bodyPr>
+          <a:lstStyle/>
           <a:p>
             <a:pPr marL="457200" algn="ctr">
               <a:lnSpc>
@@ -5489,22 +6234,41 @@
               </a:spcAft>
             </a:pPr>
             <a:r>
-              <a:rPr lang="de-DE" b="1" dirty="0">
+              <a:rPr lang="de-DE" b="1" dirty="0" smtClean="0">
+                <a:solidFill>
+                  <a:srgbClr val="FF0000"/>
+                </a:solidFill>
                 <a:latin typeface="Arial" panose="020B0604020202020204" pitchFamily="34" charset="0"/>
                 <a:ea typeface="Calibri" panose="020F0502020204030204" pitchFamily="34" charset="0"/>
                 <a:cs typeface="Times New Roman" panose="02020603050405020304" pitchFamily="18" charset="0"/>
               </a:rPr>
-              <a:t>mit </a:t>
-            </a:r>
+              <a:t>Der Fuß muss</a:t>
+            </a:r>
+          </a:p>
+          <a:p>
+            <a:pPr marL="457200" algn="ctr">
+              <a:lnSpc>
+                <a:spcPct val="107000"/>
+              </a:lnSpc>
+              <a:spcAft>
+                <a:spcPts val="800"/>
+              </a:spcAft>
+            </a:pPr>
             <a:r>
               <a:rPr lang="de-DE" b="1" dirty="0" smtClean="0">
+                <a:solidFill>
+                  <a:srgbClr val="FF0000"/>
+                </a:solidFill>
                 <a:latin typeface="Arial" panose="020B0604020202020204" pitchFamily="34" charset="0"/>
                 <a:ea typeface="Calibri" panose="020F0502020204030204" pitchFamily="34" charset="0"/>
                 <a:cs typeface="Times New Roman" panose="02020603050405020304" pitchFamily="18" charset="0"/>
               </a:rPr>
-              <a:t>Markierung</a:t>
+              <a:t>beweglich bleiben!</a:t>
             </a:r>
             <a:endParaRPr lang="de-DE" dirty="0">
+              <a:solidFill>
+                <a:srgbClr val="FF0000"/>
+              </a:solidFill>
               <a:latin typeface="Calibri" panose="020F0502020204030204" pitchFamily="34" charset="0"/>
               <a:ea typeface="Calibri" panose="020F0502020204030204" pitchFamily="34" charset="0"/>
               <a:cs typeface="Times New Roman" panose="02020603050405020304" pitchFamily="18" charset="0"/>
@@ -5514,21 +6278,21 @@
       </p:sp>
       <p:cxnSp>
         <p:nvCxnSpPr>
-          <p:cNvPr id="5" name="Gerade Verbindung mit Pfeil 4"/>
+          <p:cNvPr id="10" name="Gerade Verbindung mit Pfeil 9"/>
           <p:cNvCxnSpPr/>
           <p:nvPr/>
         </p:nvCxnSpPr>
         <p:spPr>
-          <a:xfrm>
-            <a:off x="2902998" y="2823099"/>
-            <a:ext cx="1500326" cy="1207363"/>
+          <a:xfrm flipH="1">
+            <a:off x="9112188" y="2662780"/>
+            <a:ext cx="774762" cy="155359"/>
           </a:xfrm>
           <a:prstGeom prst="straightConnector1">
             <a:avLst/>
           </a:prstGeom>
-          <a:ln w="44450">
+          <a:ln w="41275">
             <a:solidFill>
-              <a:srgbClr val="FF0000"/>
+              <a:schemeClr val="tx1"/>
             </a:solidFill>
             <a:tailEnd type="triangle"/>
           </a:ln>
@@ -5550,21 +6314,23 @@
       </p:cxnSp>
       <p:cxnSp>
         <p:nvCxnSpPr>
-          <p:cNvPr id="12" name="Gerade Verbindung mit Pfeil 11"/>
-          <p:cNvCxnSpPr/>
+          <p:cNvPr id="15" name="Gerade Verbindung mit Pfeil 14"/>
+          <p:cNvCxnSpPr>
+            <a:stCxn id="11" idx="2"/>
+          </p:cNvCxnSpPr>
           <p:nvPr/>
         </p:nvCxnSpPr>
         <p:spPr>
           <a:xfrm>
-            <a:off x="3320249" y="2737659"/>
-            <a:ext cx="2222967" cy="1746623"/>
+            <a:off x="2044516" y="2371597"/>
+            <a:ext cx="251009" cy="1124078"/>
           </a:xfrm>
           <a:prstGeom prst="straightConnector1">
             <a:avLst/>
           </a:prstGeom>
-          <a:ln w="44450">
+          <a:ln w="41275">
             <a:solidFill>
-              <a:srgbClr val="FF0000"/>
+              <a:schemeClr val="tx1"/>
             </a:solidFill>
             <a:tailEnd type="triangle"/>
           </a:ln>
@@ -5584,6 +6350,544 @@
           </a:fontRef>
         </p:style>
       </p:cxnSp>
+      <p:cxnSp>
+        <p:nvCxnSpPr>
+          <p:cNvPr id="19" name="Gerade Verbindung mit Pfeil 18"/>
+          <p:cNvCxnSpPr/>
+          <p:nvPr/>
+        </p:nvCxnSpPr>
+        <p:spPr>
+          <a:xfrm>
+            <a:off x="3055295" y="2401271"/>
+            <a:ext cx="697555" cy="1094404"/>
+          </a:xfrm>
+          <a:prstGeom prst="straightConnector1">
+            <a:avLst/>
+          </a:prstGeom>
+          <a:ln w="41275">
+            <a:solidFill>
+              <a:schemeClr val="tx1"/>
+            </a:solidFill>
+            <a:tailEnd type="triangle"/>
+          </a:ln>
+        </p:spPr>
+        <p:style>
+          <a:lnRef idx="1">
+            <a:schemeClr val="accent1"/>
+          </a:lnRef>
+          <a:fillRef idx="0">
+            <a:schemeClr val="accent1"/>
+          </a:fillRef>
+          <a:effectRef idx="0">
+            <a:schemeClr val="accent1"/>
+          </a:effectRef>
+          <a:fontRef idx="minor">
+            <a:schemeClr val="tx1"/>
+          </a:fontRef>
+        </p:style>
+      </p:cxnSp>
+      <p:sp>
+        <p:nvSpPr>
+          <p:cNvPr id="21" name="Rechteck 20"/>
+          <p:cNvSpPr/>
+          <p:nvPr/>
+        </p:nvSpPr>
+        <p:spPr>
+          <a:xfrm>
+            <a:off x="4512620" y="1618038"/>
+            <a:ext cx="2936301" cy="388696"/>
+          </a:xfrm>
+          <a:prstGeom prst="rect">
+            <a:avLst/>
+          </a:prstGeom>
+        </p:spPr>
+        <p:txBody>
+          <a:bodyPr wrap="square">
+            <a:spAutoFit/>
+          </a:bodyPr>
+          <a:lstStyle/>
+          <a:p>
+            <a:pPr marL="457200" algn="ctr">
+              <a:lnSpc>
+                <a:spcPct val="107000"/>
+              </a:lnSpc>
+              <a:spcAft>
+                <a:spcPts val="800"/>
+              </a:spcAft>
+            </a:pPr>
+            <a:r>
+              <a:rPr lang="de-DE" b="1" dirty="0" smtClean="0">
+                <a:latin typeface="Arial" panose="020B0604020202020204" pitchFamily="34" charset="0"/>
+                <a:ea typeface="Calibri" panose="020F0502020204030204" pitchFamily="34" charset="0"/>
+                <a:cs typeface="Times New Roman" panose="02020603050405020304" pitchFamily="18" charset="0"/>
+              </a:rPr>
+              <a:t>Verklebe die 2 Teile</a:t>
+            </a:r>
+            <a:endParaRPr lang="de-DE" dirty="0">
+              <a:latin typeface="Calibri" panose="020F0502020204030204" pitchFamily="34" charset="0"/>
+              <a:ea typeface="Calibri" panose="020F0502020204030204" pitchFamily="34" charset="0"/>
+              <a:cs typeface="Times New Roman" panose="02020603050405020304" pitchFamily="18" charset="0"/>
+            </a:endParaRPr>
+          </a:p>
+        </p:txBody>
+      </p:sp>
+      <p:cxnSp>
+        <p:nvCxnSpPr>
+          <p:cNvPr id="22" name="Gerade Verbindung mit Pfeil 21"/>
+          <p:cNvCxnSpPr/>
+          <p:nvPr/>
+        </p:nvCxnSpPr>
+        <p:spPr>
+          <a:xfrm>
+            <a:off x="6403413" y="1978765"/>
+            <a:ext cx="208665" cy="468629"/>
+          </a:xfrm>
+          <a:prstGeom prst="straightConnector1">
+            <a:avLst/>
+          </a:prstGeom>
+          <a:ln w="41275">
+            <a:solidFill>
+              <a:schemeClr val="tx1"/>
+            </a:solidFill>
+            <a:tailEnd type="triangle"/>
+          </a:ln>
+        </p:spPr>
+        <p:style>
+          <a:lnRef idx="1">
+            <a:schemeClr val="accent1"/>
+          </a:lnRef>
+          <a:fillRef idx="0">
+            <a:schemeClr val="accent1"/>
+          </a:fillRef>
+          <a:effectRef idx="0">
+            <a:schemeClr val="accent1"/>
+          </a:effectRef>
+          <a:fontRef idx="minor">
+            <a:schemeClr val="tx1"/>
+          </a:fontRef>
+        </p:style>
+      </p:cxnSp>
+      <p:sp>
+        <p:nvSpPr>
+          <p:cNvPr id="24" name="Rechteck 23"/>
+          <p:cNvSpPr/>
+          <p:nvPr/>
+        </p:nvSpPr>
+        <p:spPr>
+          <a:xfrm>
+            <a:off x="8027345" y="4381879"/>
+            <a:ext cx="3012130" cy="388696"/>
+          </a:xfrm>
+          <a:prstGeom prst="rect">
+            <a:avLst/>
+          </a:prstGeom>
+        </p:spPr>
+        <p:txBody>
+          <a:bodyPr wrap="square">
+            <a:spAutoFit/>
+          </a:bodyPr>
+          <a:lstStyle/>
+          <a:p>
+            <a:pPr marL="457200" algn="ctr">
+              <a:lnSpc>
+                <a:spcPct val="107000"/>
+              </a:lnSpc>
+              <a:spcAft>
+                <a:spcPts val="800"/>
+              </a:spcAft>
+            </a:pPr>
+            <a:r>
+              <a:rPr lang="de-DE" b="1" dirty="0" smtClean="0">
+                <a:latin typeface="Arial" panose="020B0604020202020204" pitchFamily="34" charset="0"/>
+                <a:ea typeface="Calibri" panose="020F0502020204030204" pitchFamily="34" charset="0"/>
+                <a:cs typeface="Times New Roman" panose="02020603050405020304" pitchFamily="18" charset="0"/>
+              </a:rPr>
+              <a:t>Verklebe die 2 Teile</a:t>
+            </a:r>
+            <a:endParaRPr lang="de-DE" dirty="0">
+              <a:latin typeface="Calibri" panose="020F0502020204030204" pitchFamily="34" charset="0"/>
+              <a:ea typeface="Calibri" panose="020F0502020204030204" pitchFamily="34" charset="0"/>
+              <a:cs typeface="Times New Roman" panose="02020603050405020304" pitchFamily="18" charset="0"/>
+            </a:endParaRPr>
+          </a:p>
+        </p:txBody>
+      </p:sp>
+      <p:cxnSp>
+        <p:nvCxnSpPr>
+          <p:cNvPr id="25" name="Gerade Verbindung mit Pfeil 24"/>
+          <p:cNvCxnSpPr/>
+          <p:nvPr/>
+        </p:nvCxnSpPr>
+        <p:spPr>
+          <a:xfrm flipH="1" flipV="1">
+            <a:off x="8782051" y="3571192"/>
+            <a:ext cx="330137" cy="852107"/>
+          </a:xfrm>
+          <a:prstGeom prst="straightConnector1">
+            <a:avLst/>
+          </a:prstGeom>
+          <a:ln w="41275">
+            <a:solidFill>
+              <a:schemeClr val="tx1"/>
+            </a:solidFill>
+            <a:tailEnd type="triangle"/>
+          </a:ln>
+        </p:spPr>
+        <p:style>
+          <a:lnRef idx="1">
+            <a:schemeClr val="accent1"/>
+          </a:lnRef>
+          <a:fillRef idx="0">
+            <a:schemeClr val="accent1"/>
+          </a:fillRef>
+          <a:effectRef idx="0">
+            <a:schemeClr val="accent1"/>
+          </a:effectRef>
+          <a:fontRef idx="minor">
+            <a:schemeClr val="tx1"/>
+          </a:fontRef>
+        </p:style>
+      </p:cxnSp>
+      <p:cxnSp>
+        <p:nvCxnSpPr>
+          <p:cNvPr id="28" name="Gerade Verbindung mit Pfeil 27"/>
+          <p:cNvCxnSpPr/>
+          <p:nvPr/>
+        </p:nvCxnSpPr>
+        <p:spPr>
+          <a:xfrm flipH="1" flipV="1">
+            <a:off x="8849745" y="3323427"/>
+            <a:ext cx="1303905" cy="1099872"/>
+          </a:xfrm>
+          <a:prstGeom prst="straightConnector1">
+            <a:avLst/>
+          </a:prstGeom>
+          <a:ln w="41275">
+            <a:solidFill>
+              <a:schemeClr val="tx1"/>
+            </a:solidFill>
+            <a:tailEnd type="triangle"/>
+          </a:ln>
+        </p:spPr>
+        <p:style>
+          <a:lnRef idx="1">
+            <a:schemeClr val="accent1"/>
+          </a:lnRef>
+          <a:fillRef idx="0">
+            <a:schemeClr val="accent1"/>
+          </a:fillRef>
+          <a:effectRef idx="0">
+            <a:schemeClr val="accent1"/>
+          </a:effectRef>
+          <a:fontRef idx="minor">
+            <a:schemeClr val="tx1"/>
+          </a:fontRef>
+        </p:style>
+      </p:cxnSp>
+      <p:sp>
+        <p:nvSpPr>
+          <p:cNvPr id="30" name="Rechteck 29"/>
+          <p:cNvSpPr/>
+          <p:nvPr/>
+        </p:nvSpPr>
+        <p:spPr>
+          <a:xfrm>
+            <a:off x="-142254" y="5401276"/>
+            <a:ext cx="3933577" cy="787652"/>
+          </a:xfrm>
+          <a:prstGeom prst="rect">
+            <a:avLst/>
+          </a:prstGeom>
+        </p:spPr>
+        <p:txBody>
+          <a:bodyPr wrap="none">
+            <a:spAutoFit/>
+          </a:bodyPr>
+          <a:lstStyle/>
+          <a:p>
+            <a:pPr marL="457200" algn="ctr">
+              <a:lnSpc>
+                <a:spcPct val="107000"/>
+              </a:lnSpc>
+              <a:spcAft>
+                <a:spcPts val="800"/>
+              </a:spcAft>
+            </a:pPr>
+            <a:r>
+              <a:rPr lang="de-DE" b="1" dirty="0">
+                <a:latin typeface="Arial" panose="020B0604020202020204" pitchFamily="34" charset="0"/>
+                <a:ea typeface="Calibri" panose="020F0502020204030204" pitchFamily="34" charset="0"/>
+                <a:cs typeface="Times New Roman" panose="02020603050405020304" pitchFamily="18" charset="0"/>
+              </a:rPr>
+              <a:t>Verwende </a:t>
+            </a:r>
+            <a:r>
+              <a:rPr lang="de-DE" b="1" dirty="0" smtClean="0">
+                <a:latin typeface="Arial" panose="020B0604020202020204" pitchFamily="34" charset="0"/>
+                <a:ea typeface="Calibri" panose="020F0502020204030204" pitchFamily="34" charset="0"/>
+                <a:cs typeface="Times New Roman" panose="02020603050405020304" pitchFamily="18" charset="0"/>
+              </a:rPr>
+              <a:t>den </a:t>
+            </a:r>
+            <a:r>
+              <a:rPr lang="de-DE" b="1" dirty="0" smtClean="0">
+                <a:latin typeface="Arial" panose="020B0604020202020204" pitchFamily="34" charset="0"/>
+                <a:ea typeface="Calibri" panose="020F0502020204030204" pitchFamily="34" charset="0"/>
+                <a:cs typeface="Times New Roman" panose="02020603050405020304" pitchFamily="18" charset="0"/>
+              </a:rPr>
+              <a:t>Abstandshalter</a:t>
+            </a:r>
+          </a:p>
+          <a:p>
+            <a:pPr marL="457200" algn="ctr">
+              <a:lnSpc>
+                <a:spcPct val="107000"/>
+              </a:lnSpc>
+              <a:spcAft>
+                <a:spcPts val="800"/>
+              </a:spcAft>
+            </a:pPr>
+            <a:r>
+              <a:rPr lang="de-DE" b="1" dirty="0">
+                <a:latin typeface="Arial" panose="020B0604020202020204" pitchFamily="34" charset="0"/>
+                <a:ea typeface="Calibri" panose="020F0502020204030204" pitchFamily="34" charset="0"/>
+                <a:cs typeface="Times New Roman" panose="02020603050405020304" pitchFamily="18" charset="0"/>
+              </a:rPr>
+              <a:t>mit </a:t>
+            </a:r>
+            <a:r>
+              <a:rPr lang="de-DE" b="1" dirty="0" smtClean="0">
+                <a:latin typeface="Arial" panose="020B0604020202020204" pitchFamily="34" charset="0"/>
+                <a:ea typeface="Calibri" panose="020F0502020204030204" pitchFamily="34" charset="0"/>
+                <a:cs typeface="Times New Roman" panose="02020603050405020304" pitchFamily="18" charset="0"/>
+              </a:rPr>
+              <a:t>Markierung</a:t>
+            </a:r>
+            <a:endParaRPr lang="de-DE" dirty="0">
+              <a:latin typeface="Calibri" panose="020F0502020204030204" pitchFamily="34" charset="0"/>
+              <a:ea typeface="Calibri" panose="020F0502020204030204" pitchFamily="34" charset="0"/>
+              <a:cs typeface="Times New Roman" panose="02020603050405020304" pitchFamily="18" charset="0"/>
+            </a:endParaRPr>
+          </a:p>
+        </p:txBody>
+      </p:sp>
+      <p:cxnSp>
+        <p:nvCxnSpPr>
+          <p:cNvPr id="31" name="Gerade Verbindung mit Pfeil 30"/>
+          <p:cNvCxnSpPr/>
+          <p:nvPr/>
+        </p:nvCxnSpPr>
+        <p:spPr>
+          <a:xfrm flipH="1" flipV="1">
+            <a:off x="2333625" y="4074818"/>
+            <a:ext cx="466726" cy="1326458"/>
+          </a:xfrm>
+          <a:prstGeom prst="straightConnector1">
+            <a:avLst/>
+          </a:prstGeom>
+          <a:ln w="44450">
+            <a:solidFill>
+              <a:srgbClr val="FF0000"/>
+            </a:solidFill>
+            <a:tailEnd type="triangle"/>
+          </a:ln>
+        </p:spPr>
+        <p:style>
+          <a:lnRef idx="1">
+            <a:schemeClr val="accent1"/>
+          </a:lnRef>
+          <a:fillRef idx="0">
+            <a:schemeClr val="accent1"/>
+          </a:fillRef>
+          <a:effectRef idx="0">
+            <a:schemeClr val="accent1"/>
+          </a:effectRef>
+          <a:fontRef idx="minor">
+            <a:schemeClr val="tx1"/>
+          </a:fontRef>
+        </p:style>
+      </p:cxnSp>
+      <p:sp>
+        <p:nvSpPr>
+          <p:cNvPr id="34" name="Ellipse 33"/>
+          <p:cNvSpPr/>
+          <p:nvPr/>
+        </p:nvSpPr>
+        <p:spPr>
+          <a:xfrm>
+            <a:off x="2295525" y="3947160"/>
+            <a:ext cx="76200" cy="86678"/>
+          </a:xfrm>
+          <a:prstGeom prst="ellipse">
+            <a:avLst/>
+          </a:prstGeom>
+          <a:noFill/>
+          <a:ln>
+            <a:solidFill>
+              <a:schemeClr val="tx1"/>
+            </a:solidFill>
+          </a:ln>
+        </p:spPr>
+        <p:style>
+          <a:lnRef idx="2">
+            <a:schemeClr val="accent1">
+              <a:shade val="50000"/>
+            </a:schemeClr>
+          </a:lnRef>
+          <a:fillRef idx="1">
+            <a:schemeClr val="accent1"/>
+          </a:fillRef>
+          <a:effectRef idx="0">
+            <a:schemeClr val="accent1"/>
+          </a:effectRef>
+          <a:fontRef idx="minor">
+            <a:schemeClr val="lt1"/>
+          </a:fontRef>
+        </p:style>
+        <p:txBody>
+          <a:bodyPr rtlCol="0" anchor="ctr"/>
+          <a:lstStyle/>
+          <a:p>
+            <a:pPr algn="ctr"/>
+            <a:endParaRPr lang="de-DE"/>
+          </a:p>
+        </p:txBody>
+      </p:sp>
+      <p:sp>
+        <p:nvSpPr>
+          <p:cNvPr id="36" name="Rechteck 35"/>
+          <p:cNvSpPr/>
+          <p:nvPr/>
+        </p:nvSpPr>
+        <p:spPr>
+          <a:xfrm>
+            <a:off x="513471" y="4184585"/>
+            <a:ext cx="1031052" cy="655244"/>
+          </a:xfrm>
+          <a:prstGeom prst="rect">
+            <a:avLst/>
+          </a:prstGeom>
+        </p:spPr>
+        <p:txBody>
+          <a:bodyPr wrap="none">
+            <a:spAutoFit/>
+          </a:bodyPr>
+          <a:lstStyle/>
+          <a:p>
+            <a:pPr marL="457200" algn="ctr">
+              <a:lnSpc>
+                <a:spcPct val="107000"/>
+              </a:lnSpc>
+              <a:spcAft>
+                <a:spcPts val="800"/>
+              </a:spcAft>
+            </a:pPr>
+            <a:r>
+              <a:rPr lang="de-DE" sz="3600" b="1" dirty="0" smtClean="0">
+                <a:latin typeface="Arial" panose="020B0604020202020204" pitchFamily="34" charset="0"/>
+                <a:ea typeface="Calibri" panose="020F0502020204030204" pitchFamily="34" charset="0"/>
+                <a:cs typeface="Times New Roman" panose="02020603050405020304" pitchFamily="18" charset="0"/>
+              </a:rPr>
+              <a:t>1.</a:t>
+            </a:r>
+            <a:endParaRPr lang="de-DE" sz="3600" dirty="0">
+              <a:latin typeface="Calibri" panose="020F0502020204030204" pitchFamily="34" charset="0"/>
+              <a:ea typeface="Calibri" panose="020F0502020204030204" pitchFamily="34" charset="0"/>
+              <a:cs typeface="Times New Roman" panose="02020603050405020304" pitchFamily="18" charset="0"/>
+            </a:endParaRPr>
+          </a:p>
+        </p:txBody>
+      </p:sp>
+      <p:sp>
+        <p:nvSpPr>
+          <p:cNvPr id="38" name="Rechteck 37"/>
+          <p:cNvSpPr/>
+          <p:nvPr/>
+        </p:nvSpPr>
+        <p:spPr>
+          <a:xfrm>
+            <a:off x="5611738" y="4184585"/>
+            <a:ext cx="1031052" cy="655244"/>
+          </a:xfrm>
+          <a:prstGeom prst="rect">
+            <a:avLst/>
+          </a:prstGeom>
+        </p:spPr>
+        <p:txBody>
+          <a:bodyPr wrap="none">
+            <a:spAutoFit/>
+          </a:bodyPr>
+          <a:lstStyle/>
+          <a:p>
+            <a:pPr marL="457200" algn="ctr">
+              <a:lnSpc>
+                <a:spcPct val="107000"/>
+              </a:lnSpc>
+              <a:spcAft>
+                <a:spcPts val="800"/>
+              </a:spcAft>
+            </a:pPr>
+            <a:r>
+              <a:rPr lang="de-DE" sz="3600" b="1" dirty="0" smtClean="0">
+                <a:latin typeface="Arial" panose="020B0604020202020204" pitchFamily="34" charset="0"/>
+                <a:ea typeface="Calibri" panose="020F0502020204030204" pitchFamily="34" charset="0"/>
+                <a:cs typeface="Times New Roman" panose="02020603050405020304" pitchFamily="18" charset="0"/>
+              </a:rPr>
+              <a:t>2.</a:t>
+            </a:r>
+            <a:endParaRPr lang="de-DE" sz="3600" dirty="0">
+              <a:latin typeface="Calibri" panose="020F0502020204030204" pitchFamily="34" charset="0"/>
+              <a:ea typeface="Calibri" panose="020F0502020204030204" pitchFamily="34" charset="0"/>
+              <a:cs typeface="Times New Roman" panose="02020603050405020304" pitchFamily="18" charset="0"/>
+            </a:endParaRPr>
+          </a:p>
+        </p:txBody>
+      </p:sp>
+      <p:sp>
+        <p:nvSpPr>
+          <p:cNvPr id="39" name="Rechteck 38"/>
+          <p:cNvSpPr/>
+          <p:nvPr/>
+        </p:nvSpPr>
+        <p:spPr>
+          <a:xfrm>
+            <a:off x="7046308" y="4184585"/>
+            <a:ext cx="1031052" cy="655244"/>
+          </a:xfrm>
+          <a:prstGeom prst="rect">
+            <a:avLst/>
+          </a:prstGeom>
+        </p:spPr>
+        <p:txBody>
+          <a:bodyPr wrap="none">
+            <a:spAutoFit/>
+          </a:bodyPr>
+          <a:lstStyle/>
+          <a:p>
+            <a:pPr marL="457200" algn="ctr">
+              <a:lnSpc>
+                <a:spcPct val="107000"/>
+              </a:lnSpc>
+              <a:spcAft>
+                <a:spcPts val="800"/>
+              </a:spcAft>
+            </a:pPr>
+            <a:r>
+              <a:rPr lang="de-DE" sz="3600" b="1" dirty="0" smtClean="0">
+                <a:latin typeface="Arial" panose="020B0604020202020204" pitchFamily="34" charset="0"/>
+                <a:ea typeface="Calibri" panose="020F0502020204030204" pitchFamily="34" charset="0"/>
+                <a:cs typeface="Times New Roman" panose="02020603050405020304" pitchFamily="18" charset="0"/>
+              </a:rPr>
+              <a:t>3.</a:t>
+            </a:r>
+            <a:endParaRPr lang="de-DE" sz="3600" dirty="0">
+              <a:latin typeface="Calibri" panose="020F0502020204030204" pitchFamily="34" charset="0"/>
+              <a:ea typeface="Calibri" panose="020F0502020204030204" pitchFamily="34" charset="0"/>
+              <a:cs typeface="Times New Roman" panose="02020603050405020304" pitchFamily="18" charset="0"/>
+            </a:endParaRPr>
+          </a:p>
+        </p:txBody>
+      </p:sp>
     </p:spTree>
     <p:extLst>
       <p:ext uri="{BB962C8B-B14F-4D97-AF65-F5344CB8AC3E}">
@@ -5648,10 +6952,6 @@
               </a:rPr>
               <a:t>Roboterhaustier</a:t>
             </a:r>
-            <a:endParaRPr lang="de-DE" b="1" dirty="0">
-              <a:latin typeface="Arial" panose="020B0604020202020204" pitchFamily="34" charset="0"/>
-              <a:cs typeface="Arial" panose="020B0604020202020204" pitchFamily="34" charset="0"/>
-            </a:endParaRPr>
           </a:p>
         </p:txBody>
       </p:sp>
@@ -5687,7 +6987,7 @@
       </p:pic>
       <p:sp>
         <p:nvSpPr>
-          <p:cNvPr id="5" name="Foliennummernplatzhalter 4"/>
+          <p:cNvPr id="4" name="Foliennummernplatzhalter 3"/>
           <p:cNvSpPr>
             <a:spLocks noGrp="1"/>
           </p:cNvSpPr>
@@ -5710,42 +7010,70 @@
       </p:sp>
       <p:sp>
         <p:nvSpPr>
-          <p:cNvPr id="15" name="Rechteck 14"/>
+          <p:cNvPr id="24" name="Rechteck 23"/>
           <p:cNvSpPr/>
           <p:nvPr/>
         </p:nvSpPr>
         <p:spPr>
           <a:xfrm>
-            <a:off x="676275" y="1956268"/>
-            <a:ext cx="2249334" cy="369332"/>
+            <a:off x="830504" y="3092948"/>
+            <a:ext cx="3012130" cy="787652"/>
           </a:xfrm>
           <a:prstGeom prst="rect">
             <a:avLst/>
           </a:prstGeom>
         </p:spPr>
         <p:txBody>
-          <a:bodyPr wrap="none">
+          <a:bodyPr wrap="square">
             <a:spAutoFit/>
           </a:bodyPr>
           <a:lstStyle/>
           <a:p>
-            <a:r>
-              <a:rPr lang="de-DE" b="1" dirty="0">
+            <a:pPr marL="457200" algn="ctr">
+              <a:lnSpc>
+                <a:spcPct val="107000"/>
+              </a:lnSpc>
+              <a:spcAft>
+                <a:spcPts val="800"/>
+              </a:spcAft>
+            </a:pPr>
+            <a:r>
+              <a:rPr lang="de-DE" b="1" dirty="0" smtClean="0">
                 <a:latin typeface="Arial" panose="020B0604020202020204" pitchFamily="34" charset="0"/>
-                <a:cs typeface="Arial" panose="020B0604020202020204" pitchFamily="34" charset="0"/>
+                <a:ea typeface="Calibri" panose="020F0502020204030204" pitchFamily="34" charset="0"/>
+                <a:cs typeface="Times New Roman" panose="02020603050405020304" pitchFamily="18" charset="0"/>
               </a:rPr>
-              <a:t>Montage der Beine</a:t>
+              <a:t>Wir benötigen</a:t>
+            </a:r>
+          </a:p>
+          <a:p>
+            <a:pPr marL="457200" algn="ctr">
+              <a:lnSpc>
+                <a:spcPct val="107000"/>
+              </a:lnSpc>
+              <a:spcAft>
+                <a:spcPts val="800"/>
+              </a:spcAft>
+            </a:pPr>
+            <a:r>
+              <a:rPr lang="de-DE" b="1" dirty="0" smtClean="0">
+                <a:latin typeface="Arial" panose="020B0604020202020204" pitchFamily="34" charset="0"/>
+                <a:ea typeface="Calibri" panose="020F0502020204030204" pitchFamily="34" charset="0"/>
+                <a:cs typeface="Times New Roman" panose="02020603050405020304" pitchFamily="18" charset="0"/>
+              </a:rPr>
+              <a:t>2 gespiegelte Füße</a:t>
             </a:r>
             <a:endParaRPr lang="de-DE" dirty="0">
-              <a:latin typeface="Arial" panose="020B0604020202020204" pitchFamily="34" charset="0"/>
-              <a:cs typeface="Arial" panose="020B0604020202020204" pitchFamily="34" charset="0"/>
+              <a:latin typeface="Calibri" panose="020F0502020204030204" pitchFamily="34" charset="0"/>
+              <a:ea typeface="Calibri" panose="020F0502020204030204" pitchFamily="34" charset="0"/>
+              <a:cs typeface="Times New Roman" panose="02020603050405020304" pitchFamily="18" charset="0"/>
             </a:endParaRPr>
           </a:p>
         </p:txBody>
       </p:sp>
       <p:pic>
         <p:nvPicPr>
-          <p:cNvPr id="16" name="Grafik 15"/>
+          <p:cNvPr id="5" name="Grafik 4"/>
           <p:cNvPicPr>
             <a:picLocks noChangeAspect="1"/>
           </p:cNvPicPr>
@@ -5759,8 +7087,8 @@
         </p:blipFill>
         <p:spPr>
           <a:xfrm>
-            <a:off x="3033712" y="1205346"/>
-            <a:ext cx="7096125" cy="5191125"/>
+            <a:off x="4020651" y="1727950"/>
+            <a:ext cx="3876675" cy="4305300"/>
           </a:xfrm>
           <a:prstGeom prst="rect">
             <a:avLst/>
@@ -5770,7 +7098,7 @@
     </p:spTree>
     <p:extLst>
       <p:ext uri="{BB962C8B-B14F-4D97-AF65-F5344CB8AC3E}">
-        <p14:creationId xmlns:p14="http://schemas.microsoft.com/office/powerpoint/2010/main" val="921904311"/>
+        <p14:creationId xmlns:p14="http://schemas.microsoft.com/office/powerpoint/2010/main" val="1963872792"/>
       </p:ext>
     </p:extLst>
   </p:cSld>
@@ -5831,10 +7159,6 @@
               </a:rPr>
               <a:t>Roboterhaustier</a:t>
             </a:r>
-            <a:endParaRPr lang="de-DE" b="1" dirty="0">
-              <a:latin typeface="Arial" panose="020B0604020202020204" pitchFamily="34" charset="0"/>
-              <a:cs typeface="Arial" panose="020B0604020202020204" pitchFamily="34" charset="0"/>
-            </a:endParaRPr>
           </a:p>
         </p:txBody>
       </p:sp>
@@ -5870,7 +7194,7 @@
       </p:pic>
       <p:sp>
         <p:nvSpPr>
-          <p:cNvPr id="7" name="Foliennummernplatzhalter 6"/>
+          <p:cNvPr id="4" name="Foliennummernplatzhalter 3"/>
           <p:cNvSpPr>
             <a:spLocks noGrp="1"/>
           </p:cNvSpPr>
@@ -5891,49 +7215,16 @@
           </a:p>
         </p:txBody>
       </p:sp>
-      <p:pic>
-        <p:nvPicPr>
-          <p:cNvPr id="14" name="Grafik 13"/>
-          <p:cNvPicPr/>
-          <p:nvPr/>
-        </p:nvPicPr>
-        <p:blipFill>
-          <a:blip r:embed="rId3">
-            <a:extLst>
-              <a:ext uri="{28A0092B-C50C-407E-A947-70E740481C1C}">
-                <a14:useLocalDpi xmlns:a14="http://schemas.microsoft.com/office/drawing/2010/main" val="0"/>
-              </a:ext>
-            </a:extLst>
-          </a:blip>
-          <a:srcRect/>
-          <a:stretch>
-            <a:fillRect/>
-          </a:stretch>
-        </p:blipFill>
-        <p:spPr bwMode="auto">
-          <a:xfrm>
-            <a:off x="3136833" y="1086444"/>
-            <a:ext cx="5486071" cy="5588314"/>
-          </a:xfrm>
-          <a:prstGeom prst="rect">
-            <a:avLst/>
-          </a:prstGeom>
-          <a:noFill/>
-          <a:ln>
-            <a:noFill/>
-          </a:ln>
-        </p:spPr>
-      </p:pic>
-      <p:sp>
-        <p:nvSpPr>
-          <p:cNvPr id="15" name="Rechteck 14"/>
+      <p:sp>
+        <p:nvSpPr>
+          <p:cNvPr id="26" name="Rechteck 25"/>
           <p:cNvSpPr/>
           <p:nvPr/>
         </p:nvSpPr>
         <p:spPr>
           <a:xfrm>
-            <a:off x="480901" y="1956268"/>
-            <a:ext cx="2044149" cy="772712"/>
+            <a:off x="7268568" y="2525249"/>
+            <a:ext cx="3856632" cy="1186607"/>
           </a:xfrm>
           <a:prstGeom prst="rect">
             <a:avLst/>
@@ -5954,12 +7245,20 @@
               </a:spcAft>
             </a:pPr>
             <a:r>
+              <a:rPr lang="de-DE" b="1" dirty="0">
+                <a:latin typeface="Arial" panose="020B0604020202020204" pitchFamily="34" charset="0"/>
+                <a:ea typeface="Calibri" panose="020F0502020204030204" pitchFamily="34" charset="0"/>
+                <a:cs typeface="Times New Roman" panose="02020603050405020304" pitchFamily="18" charset="0"/>
+              </a:rPr>
+              <a:t>Verwende die </a:t>
+            </a:r>
+            <a:r>
               <a:rPr lang="de-DE" b="1" dirty="0" smtClean="0">
                 <a:latin typeface="Arial" panose="020B0604020202020204" pitchFamily="34" charset="0"/>
                 <a:ea typeface="Calibri" panose="020F0502020204030204" pitchFamily="34" charset="0"/>
                 <a:cs typeface="Times New Roman" panose="02020603050405020304" pitchFamily="18" charset="0"/>
               </a:rPr>
-              <a:t>Endmontage</a:t>
+              <a:t>Abstandshalter</a:t>
             </a:r>
           </a:p>
           <a:p>
@@ -5972,16 +7271,40 @@
               </a:spcAft>
             </a:pPr>
             <a:r>
-              <a:rPr lang="de-DE" b="1" dirty="0" smtClean="0">
-                <a:effectLst/>
+              <a:rPr lang="de-DE" b="1" dirty="0">
                 <a:latin typeface="Arial" panose="020B0604020202020204" pitchFamily="34" charset="0"/>
                 <a:ea typeface="Calibri" panose="020F0502020204030204" pitchFamily="34" charset="0"/>
                 <a:cs typeface="Times New Roman" panose="02020603050405020304" pitchFamily="18" charset="0"/>
               </a:rPr>
-              <a:t>der Beine</a:t>
+              <a:t>mit </a:t>
+            </a:r>
+            <a:r>
+              <a:rPr lang="de-DE" b="1" dirty="0" smtClean="0">
+                <a:latin typeface="Arial" panose="020B0604020202020204" pitchFamily="34" charset="0"/>
+                <a:ea typeface="Calibri" panose="020F0502020204030204" pitchFamily="34" charset="0"/>
+                <a:cs typeface="Times New Roman" panose="02020603050405020304" pitchFamily="18" charset="0"/>
+              </a:rPr>
+              <a:t>Markierung</a:t>
+            </a:r>
+          </a:p>
+          <a:p>
+            <a:pPr marL="457200" algn="ctr">
+              <a:lnSpc>
+                <a:spcPct val="107000"/>
+              </a:lnSpc>
+              <a:spcAft>
+                <a:spcPts val="800"/>
+              </a:spcAft>
+            </a:pPr>
+            <a:r>
+              <a:rPr lang="de-DE" b="1" dirty="0" smtClean="0">
+                <a:latin typeface="Arial" panose="020B0604020202020204" pitchFamily="34" charset="0"/>
+                <a:ea typeface="Calibri" panose="020F0502020204030204" pitchFamily="34" charset="0"/>
+                <a:cs typeface="Times New Roman" panose="02020603050405020304" pitchFamily="18" charset="0"/>
+              </a:rPr>
+              <a:t>und verklebe die Teile</a:t>
             </a:r>
             <a:endParaRPr lang="de-DE" dirty="0">
-              <a:effectLst/>
               <a:latin typeface="Calibri" panose="020F0502020204030204" pitchFamily="34" charset="0"/>
               <a:ea typeface="Calibri" panose="020F0502020204030204" pitchFamily="34" charset="0"/>
               <a:cs typeface="Times New Roman" panose="02020603050405020304" pitchFamily="18" charset="0"/>
@@ -5989,10 +7312,70 @@
           </a:p>
         </p:txBody>
       </p:sp>
+      <p:pic>
+        <p:nvPicPr>
+          <p:cNvPr id="6" name="Grafik 5"/>
+          <p:cNvPicPr>
+            <a:picLocks noChangeAspect="1"/>
+          </p:cNvPicPr>
+          <p:nvPr/>
+        </p:nvPicPr>
+        <p:blipFill>
+          <a:blip r:embed="rId3"/>
+          <a:stretch>
+            <a:fillRect/>
+          </a:stretch>
+        </p:blipFill>
+        <p:spPr>
+          <a:xfrm>
+            <a:off x="2390775" y="1346951"/>
+            <a:ext cx="5048250" cy="5067300"/>
+          </a:xfrm>
+          <a:prstGeom prst="rect">
+            <a:avLst/>
+          </a:prstGeom>
+        </p:spPr>
+      </p:pic>
+      <p:cxnSp>
+        <p:nvCxnSpPr>
+          <p:cNvPr id="27" name="Gerade Verbindung mit Pfeil 26"/>
+          <p:cNvCxnSpPr/>
+          <p:nvPr/>
+        </p:nvCxnSpPr>
+        <p:spPr>
+          <a:xfrm flipH="1">
+            <a:off x="4848225" y="3677527"/>
+            <a:ext cx="3091649" cy="1208798"/>
+          </a:xfrm>
+          <a:prstGeom prst="straightConnector1">
+            <a:avLst/>
+          </a:prstGeom>
+          <a:ln w="44450">
+            <a:solidFill>
+              <a:srgbClr val="FF0000"/>
+            </a:solidFill>
+            <a:tailEnd type="triangle"/>
+          </a:ln>
+        </p:spPr>
+        <p:style>
+          <a:lnRef idx="1">
+            <a:schemeClr val="accent1"/>
+          </a:lnRef>
+          <a:fillRef idx="0">
+            <a:schemeClr val="accent1"/>
+          </a:fillRef>
+          <a:effectRef idx="0">
+            <a:schemeClr val="accent1"/>
+          </a:effectRef>
+          <a:fontRef idx="minor">
+            <a:schemeClr val="tx1"/>
+          </a:fontRef>
+        </p:style>
+      </p:cxnSp>
     </p:spTree>
     <p:extLst>
       <p:ext uri="{BB962C8B-B14F-4D97-AF65-F5344CB8AC3E}">
-        <p14:creationId xmlns:p14="http://schemas.microsoft.com/office/powerpoint/2010/main" val="300629078"/>
+        <p14:creationId xmlns:p14="http://schemas.microsoft.com/office/powerpoint/2010/main" val="2161384211"/>
       </p:ext>
     </p:extLst>
   </p:cSld>

--- a/pdf/Roboterhaustier.pptx
+++ b/pdf/Roboterhaustier.pptx
@@ -4305,7 +4305,7 @@
         <p:spPr>
           <a:xfrm>
             <a:off x="480901" y="1956268"/>
-            <a:ext cx="2044149" cy="772712"/>
+            <a:ext cx="2044149" cy="787652"/>
           </a:xfrm>
           <a:prstGeom prst="rect">
             <a:avLst/>
@@ -4350,7 +4350,16 @@
                 <a:ea typeface="Calibri" panose="020F0502020204030204" pitchFamily="34" charset="0"/>
                 <a:cs typeface="Times New Roman" panose="02020603050405020304" pitchFamily="18" charset="0"/>
               </a:rPr>
-              <a:t>der Beine</a:t>
+              <a:t>der </a:t>
+            </a:r>
+            <a:r>
+              <a:rPr lang="de-DE" b="1" dirty="0" smtClean="0">
+                <a:effectLst/>
+                <a:latin typeface="Arial" panose="020B0604020202020204" pitchFamily="34" charset="0"/>
+                <a:ea typeface="Calibri" panose="020F0502020204030204" pitchFamily="34" charset="0"/>
+                <a:cs typeface="Times New Roman" panose="02020603050405020304" pitchFamily="18" charset="0"/>
+              </a:rPr>
+              <a:t>Füße</a:t>
             </a:r>
             <a:endParaRPr lang="de-DE" dirty="0">
               <a:effectLst/>
@@ -4895,25 +4904,8 @@
                 <a:latin typeface="Arial" panose="020B0604020202020204" pitchFamily="34" charset="0"/>
                 <a:cs typeface="Arial" panose="020B0604020202020204" pitchFamily="34" charset="0"/>
               </a:rPr>
-              <a:t>Entsorge </a:t>
-            </a:r>
-            <a:r>
-              <a:rPr lang="de-DE" b="1" dirty="0" smtClean="0">
-                <a:solidFill>
-                  <a:srgbClr val="FF0000"/>
-                </a:solidFill>
-                <a:latin typeface="Arial" panose="020B0604020202020204" pitchFamily="34" charset="0"/>
-                <a:cs typeface="Arial" panose="020B0604020202020204" pitchFamily="34" charset="0"/>
-              </a:rPr>
-              <a:t>Batterien</a:t>
-            </a:r>
-            <a:endParaRPr lang="de-DE" b="1" dirty="0" smtClean="0">
-              <a:solidFill>
-                <a:srgbClr val="FF0000"/>
-              </a:solidFill>
-              <a:latin typeface="Arial" panose="020B0604020202020204" pitchFamily="34" charset="0"/>
-              <a:cs typeface="Arial" panose="020B0604020202020204" pitchFamily="34" charset="0"/>
-            </a:endParaRPr>
+              <a:t>Entsorge Batterien</a:t>
+            </a:r>
           </a:p>
           <a:p>
             <a:pPr marL="457200" algn="ctr">
@@ -4934,19 +4926,7 @@
                 <a:ea typeface="Calibri" panose="020F0502020204030204" pitchFamily="34" charset="0"/>
                 <a:cs typeface="Arial" panose="020B0604020202020204" pitchFamily="34" charset="0"/>
               </a:rPr>
-              <a:t>nicht </a:t>
-            </a:r>
-            <a:r>
-              <a:rPr lang="de-DE" b="1" dirty="0" smtClean="0">
-                <a:solidFill>
-                  <a:srgbClr val="FF0000"/>
-                </a:solidFill>
-                <a:effectLst/>
-                <a:latin typeface="Arial" panose="020B0604020202020204" pitchFamily="34" charset="0"/>
-                <a:ea typeface="Calibri" panose="020F0502020204030204" pitchFamily="34" charset="0"/>
-                <a:cs typeface="Arial" panose="020B0604020202020204" pitchFamily="34" charset="0"/>
-              </a:rPr>
-              <a:t>im Hausmüll!</a:t>
+              <a:t>nicht im Hausmüll!</a:t>
             </a:r>
             <a:endParaRPr lang="de-DE" dirty="0">
               <a:solidFill>
@@ -4960,6 +4940,30 @@
           </a:p>
         </p:txBody>
       </p:sp>
+      <p:pic>
+        <p:nvPicPr>
+          <p:cNvPr id="2" name="Grafik 1"/>
+          <p:cNvPicPr>
+            <a:picLocks noChangeAspect="1"/>
+          </p:cNvPicPr>
+          <p:nvPr/>
+        </p:nvPicPr>
+        <p:blipFill>
+          <a:blip r:embed="rId4"/>
+          <a:stretch>
+            <a:fillRect/>
+          </a:stretch>
+        </p:blipFill>
+        <p:spPr>
+          <a:xfrm>
+            <a:off x="671438" y="3730749"/>
+            <a:ext cx="2209800" cy="1724025"/>
+          </a:xfrm>
+          <a:prstGeom prst="rect">
+            <a:avLst/>
+          </a:prstGeom>
+        </p:spPr>
+      </p:pic>
     </p:spTree>
     <p:extLst>
       <p:ext uri="{BB962C8B-B14F-4D97-AF65-F5344CB8AC3E}">
@@ -6627,15 +6631,7 @@
                 <a:ea typeface="Calibri" panose="020F0502020204030204" pitchFamily="34" charset="0"/>
                 <a:cs typeface="Times New Roman" panose="02020603050405020304" pitchFamily="18" charset="0"/>
               </a:rPr>
-              <a:t>den </a:t>
-            </a:r>
-            <a:r>
-              <a:rPr lang="de-DE" b="1" dirty="0" smtClean="0">
-                <a:latin typeface="Arial" panose="020B0604020202020204" pitchFamily="34" charset="0"/>
-                <a:ea typeface="Calibri" panose="020F0502020204030204" pitchFamily="34" charset="0"/>
-                <a:cs typeface="Times New Roman" panose="02020603050405020304" pitchFamily="18" charset="0"/>
-              </a:rPr>
-              <a:t>Abstandshalter</a:t>
+              <a:t>den Abstandshalter</a:t>
             </a:r>
           </a:p>
           <a:p>

--- a/pdf/Roboterhaustier.pptx
+++ b/pdf/Roboterhaustier.pptx
@@ -3819,8 +3819,8 @@
         </p:nvSpPr>
         <p:spPr>
           <a:xfrm>
-            <a:off x="4293537" y="1892625"/>
-            <a:ext cx="3172663" cy="1186607"/>
+            <a:off x="4332009" y="1892625"/>
+            <a:ext cx="3095720" cy="1186607"/>
           </a:xfrm>
           <a:prstGeom prst="rect">
             <a:avLst/>
@@ -3846,7 +3846,23 @@
                 <a:ea typeface="Calibri" panose="020F0502020204030204" pitchFamily="34" charset="0"/>
                 <a:cs typeface="Times New Roman" panose="02020603050405020304" pitchFamily="18" charset="0"/>
               </a:rPr>
-              <a:t>Montiere den Exzenter </a:t>
+              <a:t>Montiere </a:t>
+            </a:r>
+            <a:r>
+              <a:rPr lang="de-DE" b="1" dirty="0" smtClean="0">
+                <a:latin typeface="Arial" panose="020B0604020202020204" pitchFamily="34" charset="0"/>
+                <a:ea typeface="Calibri" panose="020F0502020204030204" pitchFamily="34" charset="0"/>
+                <a:cs typeface="Times New Roman" panose="02020603050405020304" pitchFamily="18" charset="0"/>
+              </a:rPr>
+              <a:t>die </a:t>
+            </a:r>
+            <a:r>
+              <a:rPr lang="de-DE" b="1" dirty="0" smtClean="0">
+                <a:latin typeface="Arial" panose="020B0604020202020204" pitchFamily="34" charset="0"/>
+                <a:ea typeface="Calibri" panose="020F0502020204030204" pitchFamily="34" charset="0"/>
+                <a:cs typeface="Times New Roman" panose="02020603050405020304" pitchFamily="18" charset="0"/>
+              </a:rPr>
+              <a:t>Exzenter </a:t>
             </a:r>
           </a:p>
           <a:p>
@@ -4093,7 +4109,7 @@
         <p:spPr>
           <a:xfrm>
             <a:off x="676275" y="1956268"/>
-            <a:ext cx="2159566" cy="369332"/>
+            <a:ext cx="2159566" cy="646331"/>
           </a:xfrm>
           <a:prstGeom prst="rect">
             <a:avLst/>
@@ -4110,7 +4126,24 @@
                 <a:latin typeface="Arial" panose="020B0604020202020204" pitchFamily="34" charset="0"/>
                 <a:cs typeface="Arial" panose="020B0604020202020204" pitchFamily="34" charset="0"/>
               </a:rPr>
-              <a:t>Montiere die Füße</a:t>
+              <a:t>Montiere die </a:t>
+            </a:r>
+            <a:r>
+              <a:rPr lang="de-DE" b="1" dirty="0" smtClean="0">
+                <a:latin typeface="Arial" panose="020B0604020202020204" pitchFamily="34" charset="0"/>
+                <a:cs typeface="Arial" panose="020B0604020202020204" pitchFamily="34" charset="0"/>
+              </a:rPr>
+              <a:t>Füße</a:t>
+            </a:r>
+          </a:p>
+          <a:p>
+            <a:pPr algn="ctr"/>
+            <a:r>
+              <a:rPr lang="de-DE" b="1" dirty="0" smtClean="0">
+                <a:latin typeface="Arial" panose="020B0604020202020204" pitchFamily="34" charset="0"/>
+                <a:cs typeface="Arial" panose="020B0604020202020204" pitchFamily="34" charset="0"/>
+              </a:rPr>
+              <a:t>an den Körper</a:t>
             </a:r>
             <a:endParaRPr lang="de-DE" dirty="0">
               <a:latin typeface="Arial" panose="020B0604020202020204" pitchFamily="34" charset="0"/>
@@ -4121,7 +4154,7 @@
       </p:sp>
       <p:pic>
         <p:nvPicPr>
-          <p:cNvPr id="16" name="Grafik 15"/>
+          <p:cNvPr id="3" name="Grafik 2"/>
           <p:cNvPicPr>
             <a:picLocks noChangeAspect="1"/>
           </p:cNvPicPr>
@@ -4135,7 +4168,7 @@
         </p:blipFill>
         <p:spPr>
           <a:xfrm>
-            <a:off x="3033712" y="1205346"/>
+            <a:off x="3269252" y="1347787"/>
             <a:ext cx="7096125" cy="5191125"/>
           </a:xfrm>
           <a:prstGeom prst="rect">
@@ -4350,16 +4383,7 @@
                 <a:ea typeface="Calibri" panose="020F0502020204030204" pitchFamily="34" charset="0"/>
                 <a:cs typeface="Times New Roman" panose="02020603050405020304" pitchFamily="18" charset="0"/>
               </a:rPr>
-              <a:t>der </a:t>
-            </a:r>
-            <a:r>
-              <a:rPr lang="de-DE" b="1" dirty="0" smtClean="0">
-                <a:effectLst/>
-                <a:latin typeface="Arial" panose="020B0604020202020204" pitchFamily="34" charset="0"/>
-                <a:ea typeface="Calibri" panose="020F0502020204030204" pitchFamily="34" charset="0"/>
-                <a:cs typeface="Times New Roman" panose="02020603050405020304" pitchFamily="18" charset="0"/>
-              </a:rPr>
-              <a:t>Füße</a:t>
+              <a:t>der Füße</a:t>
             </a:r>
             <a:endParaRPr lang="de-DE" dirty="0">
               <a:effectLst/>
@@ -4499,7 +4523,7 @@
         <p:spPr>
           <a:xfrm>
             <a:off x="121696" y="1984843"/>
-            <a:ext cx="3212054" cy="787652"/>
+            <a:ext cx="3212054" cy="1277786"/>
           </a:xfrm>
           <a:prstGeom prst="rect">
             <a:avLst/>
@@ -4525,25 +4549,7 @@
                 <a:ea typeface="Calibri" panose="020F0502020204030204" pitchFamily="34" charset="0"/>
                 <a:cs typeface="Times New Roman" panose="02020603050405020304" pitchFamily="18" charset="0"/>
               </a:rPr>
-              <a:t>Setze den </a:t>
-            </a:r>
-          </a:p>
-          <a:p>
-            <a:pPr marL="457200" algn="ctr">
-              <a:lnSpc>
-                <a:spcPct val="107000"/>
-              </a:lnSpc>
-              <a:spcAft>
-                <a:spcPts val="800"/>
-              </a:spcAft>
-            </a:pPr>
-            <a:r>
-              <a:rPr lang="de-DE" b="1" dirty="0" smtClean="0">
-                <a:latin typeface="Arial" panose="020B0604020202020204" pitchFamily="34" charset="0"/>
-                <a:ea typeface="Calibri" panose="020F0502020204030204" pitchFamily="34" charset="0"/>
-                <a:cs typeface="Times New Roman" panose="02020603050405020304" pitchFamily="18" charset="0"/>
-              </a:rPr>
-              <a:t>Batteriehalter </a:t>
+              <a:t>Setze den Batteriehalter </a:t>
             </a:r>
             <a:r>
               <a:rPr lang="de-DE" b="1" dirty="0" smtClean="0">
@@ -4552,7 +4558,15 @@
                 <a:ea typeface="Calibri" panose="020F0502020204030204" pitchFamily="34" charset="0"/>
                 <a:cs typeface="Times New Roman" panose="02020603050405020304" pitchFamily="18" charset="0"/>
               </a:rPr>
-              <a:t>ein</a:t>
+              <a:t>ein </a:t>
+            </a:r>
+            <a:r>
+              <a:rPr lang="de-DE" b="1" dirty="0" smtClean="0">
+                <a:latin typeface="Arial" panose="020B0604020202020204" pitchFamily="34" charset="0"/>
+                <a:ea typeface="Calibri" panose="020F0502020204030204" pitchFamily="34" charset="0"/>
+                <a:cs typeface="Times New Roman" panose="02020603050405020304" pitchFamily="18" charset="0"/>
+              </a:rPr>
+              <a:t>und löte die Kabel an den Motor</a:t>
             </a:r>
             <a:endParaRPr lang="de-DE" dirty="0">
               <a:effectLst/>
@@ -4584,8 +4598,8 @@
         </p:blipFill>
         <p:spPr bwMode="auto">
           <a:xfrm>
-            <a:off x="3495675" y="1205346"/>
-            <a:ext cx="5029200" cy="5295902"/>
+            <a:off x="3333750" y="1404851"/>
+            <a:ext cx="3405378" cy="3798085"/>
           </a:xfrm>
           <a:prstGeom prst="rect">
             <a:avLst/>
@@ -4594,6 +4608,30 @@
           <a:ln>
             <a:noFill/>
           </a:ln>
+        </p:spPr>
+      </p:pic>
+      <p:pic>
+        <p:nvPicPr>
+          <p:cNvPr id="7" name="Grafik 6"/>
+          <p:cNvPicPr>
+            <a:picLocks noChangeAspect="1"/>
+          </p:cNvPicPr>
+          <p:nvPr/>
+        </p:nvPicPr>
+        <p:blipFill>
+          <a:blip r:embed="rId4"/>
+          <a:stretch>
+            <a:fillRect/>
+          </a:stretch>
+        </p:blipFill>
+        <p:spPr>
+          <a:xfrm>
+            <a:off x="7199856" y="1544679"/>
+            <a:ext cx="4689037" cy="3658257"/>
+          </a:xfrm>
+          <a:prstGeom prst="rect">
+            <a:avLst/>
+          </a:prstGeom>
         </p:spPr>
       </p:pic>
     </p:spTree>
@@ -4724,8 +4762,8 @@
         </p:nvSpPr>
         <p:spPr>
           <a:xfrm>
-            <a:off x="90609" y="1965793"/>
-            <a:ext cx="3108544" cy="1564083"/>
+            <a:off x="398389" y="1965793"/>
+            <a:ext cx="2492990" cy="787652"/>
           </a:xfrm>
           <a:prstGeom prst="rect">
             <a:avLst/>
@@ -4746,68 +4784,23 @@
               </a:spcAft>
             </a:pPr>
             <a:r>
-              <a:rPr lang="de-DE" b="1" dirty="0">
+              <a:rPr lang="de-DE" b="1" dirty="0" err="1" smtClean="0">
                 <a:latin typeface="Arial" panose="020B0604020202020204" pitchFamily="34" charset="0"/>
                 <a:cs typeface="Arial" panose="020B0604020202020204" pitchFamily="34" charset="0"/>
               </a:rPr>
-              <a:t>Löte die Batteriekabel </a:t>
+              <a:t>Pimpe</a:t>
+            </a:r>
+            <a:r>
+              <a:rPr lang="de-DE" b="1" dirty="0" smtClean="0">
+                <a:latin typeface="Arial" panose="020B0604020202020204" pitchFamily="34" charset="0"/>
+                <a:cs typeface="Arial" panose="020B0604020202020204" pitchFamily="34" charset="0"/>
+              </a:rPr>
+              <a:t> jetzt das </a:t>
             </a:r>
             <a:endParaRPr lang="de-DE" b="1" dirty="0" smtClean="0">
               <a:latin typeface="Arial" panose="020B0604020202020204" pitchFamily="34" charset="0"/>
               <a:cs typeface="Arial" panose="020B0604020202020204" pitchFamily="34" charset="0"/>
             </a:endParaRPr>
-          </a:p>
-          <a:p>
-            <a:pPr marL="457200" algn="ctr">
-              <a:lnSpc>
-                <a:spcPct val="107000"/>
-              </a:lnSpc>
-              <a:spcAft>
-                <a:spcPts val="800"/>
-              </a:spcAft>
-            </a:pPr>
-            <a:r>
-              <a:rPr lang="de-DE" b="1" dirty="0" smtClean="0">
-                <a:latin typeface="Arial" panose="020B0604020202020204" pitchFamily="34" charset="0"/>
-                <a:cs typeface="Arial" panose="020B0604020202020204" pitchFamily="34" charset="0"/>
-              </a:rPr>
-              <a:t>an </a:t>
-            </a:r>
-            <a:r>
-              <a:rPr lang="de-DE" b="1" dirty="0">
-                <a:latin typeface="Arial" panose="020B0604020202020204" pitchFamily="34" charset="0"/>
-                <a:cs typeface="Arial" panose="020B0604020202020204" pitchFamily="34" charset="0"/>
-              </a:rPr>
-              <a:t>den Motor und </a:t>
-            </a:r>
-            <a:endParaRPr lang="de-DE" b="1" dirty="0" smtClean="0">
-              <a:latin typeface="Arial" panose="020B0604020202020204" pitchFamily="34" charset="0"/>
-              <a:cs typeface="Arial" panose="020B0604020202020204" pitchFamily="34" charset="0"/>
-            </a:endParaRPr>
-          </a:p>
-          <a:p>
-            <a:pPr marL="457200" algn="ctr">
-              <a:lnSpc>
-                <a:spcPct val="107000"/>
-              </a:lnSpc>
-              <a:spcAft>
-                <a:spcPts val="800"/>
-              </a:spcAft>
-            </a:pPr>
-            <a:r>
-              <a:rPr lang="de-DE" b="1" dirty="0" err="1" smtClean="0">
-                <a:latin typeface="Arial" panose="020B0604020202020204" pitchFamily="34" charset="0"/>
-                <a:cs typeface="Arial" panose="020B0604020202020204" pitchFamily="34" charset="0"/>
-              </a:rPr>
-              <a:t>pimpe</a:t>
-            </a:r>
-            <a:r>
-              <a:rPr lang="de-DE" b="1" dirty="0" smtClean="0">
-                <a:latin typeface="Arial" panose="020B0604020202020204" pitchFamily="34" charset="0"/>
-                <a:cs typeface="Arial" panose="020B0604020202020204" pitchFamily="34" charset="0"/>
-              </a:rPr>
-              <a:t> das </a:t>
-            </a:r>
           </a:p>
           <a:p>
             <a:pPr marL="457200" algn="ctr">
@@ -4940,30 +4933,6 @@
           </a:p>
         </p:txBody>
       </p:sp>
-      <p:pic>
-        <p:nvPicPr>
-          <p:cNvPr id="2" name="Grafik 1"/>
-          <p:cNvPicPr>
-            <a:picLocks noChangeAspect="1"/>
-          </p:cNvPicPr>
-          <p:nvPr/>
-        </p:nvPicPr>
-        <p:blipFill>
-          <a:blip r:embed="rId4"/>
-          <a:stretch>
-            <a:fillRect/>
-          </a:stretch>
-        </p:blipFill>
-        <p:spPr>
-          <a:xfrm>
-            <a:off x="671438" y="3730749"/>
-            <a:ext cx="2209800" cy="1724025"/>
-          </a:xfrm>
-          <a:prstGeom prst="rect">
-            <a:avLst/>
-          </a:prstGeom>
-        </p:spPr>
-      </p:pic>
     </p:spTree>
     <p:extLst>
       <p:ext uri="{BB962C8B-B14F-4D97-AF65-F5344CB8AC3E}">
@@ -5116,25 +5085,25 @@
               <a:rPr lang="de-DE" sz="2400" dirty="0" smtClean="0">
                 <a:cs typeface="Arial" panose="020B0604020202020204" pitchFamily="34" charset="0"/>
               </a:rPr>
-              <a:t>Wir</a:t>
+              <a:t>Der </a:t>
+            </a:r>
+            <a:r>
+              <a:rPr lang="de-DE" sz="2400" dirty="0" err="1" smtClean="0">
+                <a:cs typeface="Arial" panose="020B0604020202020204" pitchFamily="34" charset="0"/>
+              </a:rPr>
+              <a:t>Oberlab</a:t>
+            </a:r>
+            <a:r>
+              <a:rPr lang="de-DE" sz="2400" dirty="0" smtClean="0">
+                <a:cs typeface="Arial" panose="020B0604020202020204" pitchFamily="34" charset="0"/>
+              </a:rPr>
+              <a:t> </a:t>
             </a:r>
             <a:r>
               <a:rPr lang="de-DE" sz="2400" dirty="0">
                 <a:cs typeface="Arial" panose="020B0604020202020204" pitchFamily="34" charset="0"/>
               </a:rPr>
-              <a:t>, der </a:t>
-            </a:r>
-            <a:r>
-              <a:rPr lang="de-DE" sz="2400" dirty="0" err="1">
-                <a:cs typeface="Arial" panose="020B0604020202020204" pitchFamily="34" charset="0"/>
-              </a:rPr>
-              <a:t>Oberlab</a:t>
-            </a:r>
-            <a:r>
-              <a:rPr lang="de-DE" sz="2400" dirty="0">
-                <a:cs typeface="Arial" panose="020B0604020202020204" pitchFamily="34" charset="0"/>
-              </a:rPr>
-              <a:t> e.V. sind ein </a:t>
+              <a:t>e.V. sind ein </a:t>
             </a:r>
             <a:r>
               <a:rPr lang="de-DE" sz="2400" dirty="0" smtClean="0">
@@ -5399,6 +5368,51 @@
           </a:ln>
         </p:spPr>
       </p:pic>
+      <p:sp>
+        <p:nvSpPr>
+          <p:cNvPr id="6" name="Rechteck 5"/>
+          <p:cNvSpPr/>
+          <p:nvPr/>
+        </p:nvSpPr>
+        <p:spPr>
+          <a:xfrm>
+            <a:off x="595760" y="1965412"/>
+            <a:ext cx="2454519" cy="373757"/>
+          </a:xfrm>
+          <a:prstGeom prst="rect">
+            <a:avLst/>
+          </a:prstGeom>
+        </p:spPr>
+        <p:txBody>
+          <a:bodyPr wrap="none">
+            <a:spAutoFit/>
+          </a:bodyPr>
+          <a:lstStyle/>
+          <a:p>
+            <a:pPr algn="ctr">
+              <a:lnSpc>
+                <a:spcPct val="107000"/>
+              </a:lnSpc>
+              <a:spcAft>
+                <a:spcPts val="800"/>
+              </a:spcAft>
+            </a:pPr>
+            <a:r>
+              <a:rPr lang="de-DE" b="1" dirty="0" smtClean="0">
+                <a:latin typeface="Arial" panose="020B0604020202020204" pitchFamily="34" charset="0"/>
+                <a:ea typeface="Calibri" panose="020F0502020204030204" pitchFamily="34" charset="0"/>
+                <a:cs typeface="Times New Roman" panose="02020603050405020304" pitchFamily="18" charset="0"/>
+              </a:rPr>
+              <a:t>Das Roboterhaustier</a:t>
+            </a:r>
+            <a:endParaRPr lang="de-DE" sz="1600" dirty="0">
+              <a:latin typeface="Calibri" panose="020F0502020204030204" pitchFamily="34" charset="0"/>
+              <a:ea typeface="Calibri" panose="020F0502020204030204" pitchFamily="34" charset="0"/>
+              <a:cs typeface="Times New Roman" panose="02020603050405020304" pitchFamily="18" charset="0"/>
+            </a:endParaRPr>
+          </a:p>
+        </p:txBody>
+      </p:sp>
     </p:spTree>
     <p:extLst>
       <p:ext uri="{BB962C8B-B14F-4D97-AF65-F5344CB8AC3E}">
@@ -5560,8 +5574,8 @@
         </p:nvSpPr>
         <p:spPr>
           <a:xfrm>
-            <a:off x="865621" y="1956268"/>
-            <a:ext cx="1274708" cy="373757"/>
+            <a:off x="654024" y="1956268"/>
+            <a:ext cx="1697902" cy="373757"/>
           </a:xfrm>
           <a:prstGeom prst="rect">
             <a:avLst/>
@@ -5582,12 +5596,12 @@
               </a:spcAft>
             </a:pPr>
             <a:r>
-              <a:rPr lang="de-DE" b="1" dirty="0">
+              <a:rPr lang="de-DE" b="1" dirty="0" smtClean="0">
                 <a:latin typeface="Arial" panose="020B0604020202020204" pitchFamily="34" charset="0"/>
                 <a:ea typeface="Calibri" panose="020F0502020204030204" pitchFamily="34" charset="0"/>
                 <a:cs typeface="Times New Roman" panose="02020603050405020304" pitchFamily="18" charset="0"/>
               </a:rPr>
-              <a:t>Stückliste</a:t>
+              <a:t>Die Stückliste</a:t>
             </a:r>
             <a:endParaRPr lang="de-DE" sz="1600" dirty="0">
               <a:latin typeface="Calibri" panose="020F0502020204030204" pitchFamily="34" charset="0"/>
@@ -5738,7 +5752,7 @@
         </p:blipFill>
         <p:spPr bwMode="auto">
           <a:xfrm>
-            <a:off x="3474866" y="1540214"/>
+            <a:off x="4709306" y="1540214"/>
             <a:ext cx="5135734" cy="4816136"/>
           </a:xfrm>
           <a:prstGeom prst="rect">
@@ -5758,8 +5772,8 @@
         </p:nvSpPr>
         <p:spPr>
           <a:xfrm>
-            <a:off x="0" y="1956268"/>
-            <a:ext cx="3005951" cy="388696"/>
+            <a:off x="145020" y="1956268"/>
+            <a:ext cx="3429144" cy="373757"/>
           </a:xfrm>
           <a:prstGeom prst="rect">
             <a:avLst/>
@@ -5780,12 +5794,20 @@
               </a:spcAft>
             </a:pPr>
             <a:r>
+              <a:rPr lang="de-DE" b="1" dirty="0" smtClean="0">
+                <a:latin typeface="Arial" panose="020B0604020202020204" pitchFamily="34" charset="0"/>
+                <a:ea typeface="Calibri" panose="020F0502020204030204" pitchFamily="34" charset="0"/>
+                <a:cs typeface="Times New Roman" panose="02020603050405020304" pitchFamily="18" charset="0"/>
+              </a:rPr>
+              <a:t>Die Montage </a:t>
+            </a:r>
+            <a:r>
               <a:rPr lang="de-DE" b="1" dirty="0">
                 <a:latin typeface="Arial" panose="020B0604020202020204" pitchFamily="34" charset="0"/>
                 <a:ea typeface="Calibri" panose="020F0502020204030204" pitchFamily="34" charset="0"/>
                 <a:cs typeface="Times New Roman" panose="02020603050405020304" pitchFamily="18" charset="0"/>
               </a:rPr>
-              <a:t>Montage des Körpers</a:t>
+              <a:t>des Körpers</a:t>
             </a:r>
             <a:endParaRPr lang="de-DE" sz="1600" dirty="0">
               <a:effectLst/>
@@ -5937,7 +5959,7 @@
         </p:blipFill>
         <p:spPr bwMode="auto">
           <a:xfrm>
-            <a:off x="3715986" y="1874520"/>
+            <a:off x="4858986" y="1755648"/>
             <a:ext cx="4894614" cy="4681335"/>
           </a:xfrm>
           <a:prstGeom prst="rect">
@@ -5951,14 +5973,14 @@
       </p:pic>
       <p:sp>
         <p:nvSpPr>
-          <p:cNvPr id="11" name="Rechteck 10"/>
+          <p:cNvPr id="10" name="Rechteck 9"/>
           <p:cNvSpPr/>
           <p:nvPr/>
         </p:nvSpPr>
         <p:spPr>
           <a:xfrm>
-            <a:off x="0" y="1956268"/>
-            <a:ext cx="3005951" cy="388696"/>
+            <a:off x="145020" y="1956268"/>
+            <a:ext cx="3429144" cy="373757"/>
           </a:xfrm>
           <a:prstGeom prst="rect">
             <a:avLst/>
@@ -5979,12 +6001,20 @@
               </a:spcAft>
             </a:pPr>
             <a:r>
+              <a:rPr lang="de-DE" b="1" dirty="0" smtClean="0">
+                <a:latin typeface="Arial" panose="020B0604020202020204" pitchFamily="34" charset="0"/>
+                <a:ea typeface="Calibri" panose="020F0502020204030204" pitchFamily="34" charset="0"/>
+                <a:cs typeface="Times New Roman" panose="02020603050405020304" pitchFamily="18" charset="0"/>
+              </a:rPr>
+              <a:t>Die Montage </a:t>
+            </a:r>
+            <a:r>
               <a:rPr lang="de-DE" b="1" dirty="0">
                 <a:latin typeface="Arial" panose="020B0604020202020204" pitchFamily="34" charset="0"/>
                 <a:ea typeface="Calibri" panose="020F0502020204030204" pitchFamily="34" charset="0"/>
                 <a:cs typeface="Times New Roman" panose="02020603050405020304" pitchFamily="18" charset="0"/>
               </a:rPr>
-              <a:t>Montage des Körpers</a:t>
+              <a:t>des Körpers</a:t>
             </a:r>
             <a:endParaRPr lang="de-DE" sz="1600" dirty="0">
               <a:effectLst/>
@@ -7219,8 +7249,8 @@
         </p:nvSpPr>
         <p:spPr>
           <a:xfrm>
-            <a:off x="7268568" y="2525249"/>
-            <a:ext cx="3856632" cy="1186607"/>
+            <a:off x="7268569" y="2525249"/>
+            <a:ext cx="3856633" cy="1585562"/>
           </a:xfrm>
           <a:prstGeom prst="rect">
             <a:avLst/>
@@ -7298,7 +7328,33 @@
                 <a:ea typeface="Calibri" panose="020F0502020204030204" pitchFamily="34" charset="0"/>
                 <a:cs typeface="Times New Roman" panose="02020603050405020304" pitchFamily="18" charset="0"/>
               </a:rPr>
-              <a:t>und verklebe die Teile</a:t>
+              <a:t>und verklebe die </a:t>
+            </a:r>
+            <a:r>
+              <a:rPr lang="de-DE" b="1" dirty="0" smtClean="0">
+                <a:latin typeface="Arial" panose="020B0604020202020204" pitchFamily="34" charset="0"/>
+                <a:ea typeface="Calibri" panose="020F0502020204030204" pitchFamily="34" charset="0"/>
+                <a:cs typeface="Times New Roman" panose="02020603050405020304" pitchFamily="18" charset="0"/>
+              </a:rPr>
+              <a:t>Teile auf </a:t>
+            </a:r>
+          </a:p>
+          <a:p>
+            <a:pPr marL="457200" algn="ctr">
+              <a:lnSpc>
+                <a:spcPct val="107000"/>
+              </a:lnSpc>
+              <a:spcAft>
+                <a:spcPts val="800"/>
+              </a:spcAft>
+            </a:pPr>
+            <a:r>
+              <a:rPr lang="de-DE" b="1" dirty="0" smtClean="0">
+                <a:latin typeface="Arial" panose="020B0604020202020204" pitchFamily="34" charset="0"/>
+                <a:ea typeface="Calibri" panose="020F0502020204030204" pitchFamily="34" charset="0"/>
+                <a:cs typeface="Times New Roman" panose="02020603050405020304" pitchFamily="18" charset="0"/>
+              </a:rPr>
+              <a:t>beiden Seiten</a:t>
             </a:r>
             <a:endParaRPr lang="de-DE" dirty="0">
               <a:latin typeface="Calibri" panose="020F0502020204030204" pitchFamily="34" charset="0"/>
@@ -7342,6 +7398,42 @@
           <a:xfrm flipH="1">
             <a:off x="4848225" y="3677527"/>
             <a:ext cx="3091649" cy="1208798"/>
+          </a:xfrm>
+          <a:prstGeom prst="straightConnector1">
+            <a:avLst/>
+          </a:prstGeom>
+          <a:ln w="44450">
+            <a:solidFill>
+              <a:srgbClr val="FF0000"/>
+            </a:solidFill>
+            <a:tailEnd type="triangle"/>
+          </a:ln>
+        </p:spPr>
+        <p:style>
+          <a:lnRef idx="1">
+            <a:schemeClr val="accent1"/>
+          </a:lnRef>
+          <a:fillRef idx="0">
+            <a:schemeClr val="accent1"/>
+          </a:fillRef>
+          <a:effectRef idx="0">
+            <a:schemeClr val="accent1"/>
+          </a:effectRef>
+          <a:fontRef idx="minor">
+            <a:schemeClr val="tx1"/>
+          </a:fontRef>
+        </p:style>
+      </p:cxnSp>
+      <p:cxnSp>
+        <p:nvCxnSpPr>
+          <p:cNvPr id="10" name="Gerade Verbindung mit Pfeil 9"/>
+          <p:cNvCxnSpPr/>
+          <p:nvPr/>
+        </p:nvCxnSpPr>
+        <p:spPr>
+          <a:xfrm flipH="1">
+            <a:off x="6890552" y="3968496"/>
+            <a:ext cx="1720048" cy="660685"/>
           </a:xfrm>
           <a:prstGeom prst="straightConnector1">
             <a:avLst/>

--- a/pdf/Roboterhaustier.pptx
+++ b/pdf/Roboterhaustier.pptx
@@ -225,7 +225,7 @@
           <a:p>
             <a:fld id="{725D9CB9-DD53-4B5A-BFEA-CC7D09232F8F}" type="datetimeFigureOut">
               <a:rPr lang="de-DE" smtClean="0"/>
-              <a:t>21.06.2024</a:t>
+              <a:t>19.11.2024</a:t>
             </a:fld>
             <a:endParaRPr lang="de-DE"/>
           </a:p>
@@ -390,7 +390,7 @@
           <a:p>
             <a:fld id="{78006F99-4802-45D8-926C-BC797F28FFA5}" type="datetimeFigureOut">
               <a:rPr lang="de-DE" smtClean="0"/>
-              <a:t>21.06.2024</a:t>
+              <a:t>19.11.2024</a:t>
             </a:fld>
             <a:endParaRPr lang="de-DE"/>
           </a:p>
@@ -789,7 +789,7 @@
           <a:p>
             <a:fld id="{A6FAC49D-ECDD-4F2C-8120-382570C1D824}" type="datetime1">
               <a:rPr lang="de-DE" smtClean="0"/>
-              <a:t>21.06.2024</a:t>
+              <a:t>19.11.2024</a:t>
             </a:fld>
             <a:endParaRPr lang="de-DE"/>
           </a:p>
@@ -959,7 +959,7 @@
           <a:p>
             <a:fld id="{E50C0A4B-13CC-45A2-8656-BAA48B2CEF29}" type="datetime1">
               <a:rPr lang="de-DE" smtClean="0"/>
-              <a:t>21.06.2024</a:t>
+              <a:t>19.11.2024</a:t>
             </a:fld>
             <a:endParaRPr lang="de-DE"/>
           </a:p>
@@ -1139,7 +1139,7 @@
           <a:p>
             <a:fld id="{2775FCF2-CA12-4DB8-B6E5-5001E6952446}" type="datetime1">
               <a:rPr lang="de-DE" smtClean="0"/>
-              <a:t>21.06.2024</a:t>
+              <a:t>19.11.2024</a:t>
             </a:fld>
             <a:endParaRPr lang="de-DE"/>
           </a:p>
@@ -1309,7 +1309,7 @@
           <a:p>
             <a:fld id="{925A2A14-E304-45CE-89EA-A90FA41C255E}" type="datetime1">
               <a:rPr lang="de-DE" smtClean="0"/>
-              <a:t>21.06.2024</a:t>
+              <a:t>19.11.2024</a:t>
             </a:fld>
             <a:endParaRPr lang="de-DE"/>
           </a:p>
@@ -1555,7 +1555,7 @@
           <a:p>
             <a:fld id="{7DC63D72-7320-429C-B303-DF07CE7A32F9}" type="datetime1">
               <a:rPr lang="de-DE" smtClean="0"/>
-              <a:t>21.06.2024</a:t>
+              <a:t>19.11.2024</a:t>
             </a:fld>
             <a:endParaRPr lang="de-DE"/>
           </a:p>
@@ -1787,7 +1787,7 @@
           <a:p>
             <a:fld id="{9182AFFB-E7C5-4130-85AA-7D4E20E1038D}" type="datetime1">
               <a:rPr lang="de-DE" smtClean="0"/>
-              <a:t>21.06.2024</a:t>
+              <a:t>19.11.2024</a:t>
             </a:fld>
             <a:endParaRPr lang="de-DE"/>
           </a:p>
@@ -2154,7 +2154,7 @@
           <a:p>
             <a:fld id="{7070F66C-6B69-4FCC-BFCA-6ED388B27025}" type="datetime1">
               <a:rPr lang="de-DE" smtClean="0"/>
-              <a:t>21.06.2024</a:t>
+              <a:t>19.11.2024</a:t>
             </a:fld>
             <a:endParaRPr lang="de-DE"/>
           </a:p>
@@ -2272,7 +2272,7 @@
           <a:p>
             <a:fld id="{B733A864-8391-4CCB-9894-41BBDB9EDB2E}" type="datetime1">
               <a:rPr lang="de-DE" smtClean="0"/>
-              <a:t>21.06.2024</a:t>
+              <a:t>19.11.2024</a:t>
             </a:fld>
             <a:endParaRPr lang="de-DE"/>
           </a:p>
@@ -2367,7 +2367,7 @@
           <a:p>
             <a:fld id="{7BE059A1-2812-426A-80C9-98BCCA31CA75}" type="datetime1">
               <a:rPr lang="de-DE" smtClean="0"/>
-              <a:t>21.06.2024</a:t>
+              <a:t>19.11.2024</a:t>
             </a:fld>
             <a:endParaRPr lang="de-DE"/>
           </a:p>
@@ -2644,7 +2644,7 @@
           <a:p>
             <a:fld id="{6F78F8F6-3BC5-43DE-B9AA-27F001652600}" type="datetime1">
               <a:rPr lang="de-DE" smtClean="0"/>
-              <a:t>21.06.2024</a:t>
+              <a:t>19.11.2024</a:t>
             </a:fld>
             <a:endParaRPr lang="de-DE"/>
           </a:p>
@@ -2897,7 +2897,7 @@
           <a:p>
             <a:fld id="{19C036CB-FB3D-4581-9159-35A00268442E}" type="datetime1">
               <a:rPr lang="de-DE" smtClean="0"/>
-              <a:t>21.06.2024</a:t>
+              <a:t>19.11.2024</a:t>
             </a:fld>
             <a:endParaRPr lang="de-DE"/>
           </a:p>
@@ -3110,7 +3110,7 @@
           <a:p>
             <a:fld id="{C239A2C5-0432-4692-819C-A358E2279F61}" type="datetime1">
               <a:rPr lang="de-DE" smtClean="0"/>
-              <a:t>21.06.2024</a:t>
+              <a:t>19.11.2024</a:t>
             </a:fld>
             <a:endParaRPr lang="de-DE"/>
           </a:p>
@@ -3846,23 +3846,7 @@
                 <a:ea typeface="Calibri" panose="020F0502020204030204" pitchFamily="34" charset="0"/>
                 <a:cs typeface="Times New Roman" panose="02020603050405020304" pitchFamily="18" charset="0"/>
               </a:rPr>
-              <a:t>Montiere </a:t>
-            </a:r>
-            <a:r>
-              <a:rPr lang="de-DE" b="1" dirty="0" smtClean="0">
-                <a:latin typeface="Arial" panose="020B0604020202020204" pitchFamily="34" charset="0"/>
-                <a:ea typeface="Calibri" panose="020F0502020204030204" pitchFamily="34" charset="0"/>
-                <a:cs typeface="Times New Roman" panose="02020603050405020304" pitchFamily="18" charset="0"/>
-              </a:rPr>
-              <a:t>die </a:t>
-            </a:r>
-            <a:r>
-              <a:rPr lang="de-DE" b="1" dirty="0" smtClean="0">
-                <a:latin typeface="Arial" panose="020B0604020202020204" pitchFamily="34" charset="0"/>
-                <a:ea typeface="Calibri" panose="020F0502020204030204" pitchFamily="34" charset="0"/>
-                <a:cs typeface="Times New Roman" panose="02020603050405020304" pitchFamily="18" charset="0"/>
-              </a:rPr>
-              <a:t>Exzenter </a:t>
+              <a:t>Montiere die Exzenter </a:t>
             </a:r>
           </a:p>
           <a:p>
@@ -4126,14 +4110,7 @@
                 <a:latin typeface="Arial" panose="020B0604020202020204" pitchFamily="34" charset="0"/>
                 <a:cs typeface="Arial" panose="020B0604020202020204" pitchFamily="34" charset="0"/>
               </a:rPr>
-              <a:t>Montiere die </a:t>
-            </a:r>
-            <a:r>
-              <a:rPr lang="de-DE" b="1" dirty="0" smtClean="0">
-                <a:latin typeface="Arial" panose="020B0604020202020204" pitchFamily="34" charset="0"/>
-                <a:cs typeface="Arial" panose="020B0604020202020204" pitchFamily="34" charset="0"/>
-              </a:rPr>
-              <a:t>Füße</a:t>
+              <a:t>Montiere die Füße</a:t>
             </a:r>
           </a:p>
           <a:p>
@@ -4797,10 +4774,6 @@
               </a:rPr>
               <a:t> jetzt das </a:t>
             </a:r>
-            <a:endParaRPr lang="de-DE" b="1" dirty="0" smtClean="0">
-              <a:latin typeface="Arial" panose="020B0604020202020204" pitchFamily="34" charset="0"/>
-              <a:cs typeface="Arial" panose="020B0604020202020204" pitchFamily="34" charset="0"/>
-            </a:endParaRPr>
           </a:p>
           <a:p>
             <a:pPr marL="457200" algn="ctr">
@@ -5533,39 +5506,6 @@
           </a:p>
         </p:txBody>
       </p:sp>
-      <p:pic>
-        <p:nvPicPr>
-          <p:cNvPr id="6" name="Grafik 5"/>
-          <p:cNvPicPr/>
-          <p:nvPr/>
-        </p:nvPicPr>
-        <p:blipFill>
-          <a:blip r:embed="rId3">
-            <a:extLst>
-              <a:ext uri="{28A0092B-C50C-407E-A947-70E740481C1C}">
-                <a14:useLocalDpi xmlns:a14="http://schemas.microsoft.com/office/drawing/2010/main" val="0"/>
-              </a:ext>
-            </a:extLst>
-          </a:blip>
-          <a:srcRect/>
-          <a:stretch>
-            <a:fillRect/>
-          </a:stretch>
-        </p:blipFill>
-        <p:spPr bwMode="auto">
-          <a:xfrm>
-            <a:off x="3260891" y="1162050"/>
-            <a:ext cx="6344920" cy="5559425"/>
-          </a:xfrm>
-          <a:prstGeom prst="rect">
-            <a:avLst/>
-          </a:prstGeom>
-          <a:noFill/>
-          <a:ln>
-            <a:noFill/>
-          </a:ln>
-        </p:spPr>
-      </p:pic>
       <p:sp>
         <p:nvSpPr>
           <p:cNvPr id="11" name="Rechteck 10"/>
@@ -5611,6 +5551,30 @@
           </a:p>
         </p:txBody>
       </p:sp>
+      <p:pic>
+        <p:nvPicPr>
+          <p:cNvPr id="2" name="Grafik 1"/>
+          <p:cNvPicPr>
+            <a:picLocks noChangeAspect="1"/>
+          </p:cNvPicPr>
+          <p:nvPr/>
+        </p:nvPicPr>
+        <p:blipFill>
+          <a:blip r:embed="rId3"/>
+          <a:stretch>
+            <a:fillRect/>
+          </a:stretch>
+        </p:blipFill>
+        <p:spPr>
+          <a:xfrm>
+            <a:off x="3119349" y="1124857"/>
+            <a:ext cx="5647696" cy="5430998"/>
+          </a:xfrm>
+          <a:prstGeom prst="rect">
+            <a:avLst/>
+          </a:prstGeom>
+        </p:spPr>
+      </p:pic>
     </p:spTree>
     <p:extLst>
       <p:ext uri="{BB962C8B-B14F-4D97-AF65-F5344CB8AC3E}">
@@ -6509,8 +6473,8 @@
         </p:nvSpPr>
         <p:spPr>
           <a:xfrm>
-            <a:off x="8027345" y="4381879"/>
-            <a:ext cx="3012130" cy="388696"/>
+            <a:off x="8368663" y="4377433"/>
+            <a:ext cx="3012130" cy="373757"/>
           </a:xfrm>
           <a:prstGeom prst="rect">
             <a:avLst/>
@@ -6536,7 +6500,7 @@
                 <a:ea typeface="Calibri" panose="020F0502020204030204" pitchFamily="34" charset="0"/>
                 <a:cs typeface="Times New Roman" panose="02020603050405020304" pitchFamily="18" charset="0"/>
               </a:rPr>
-              <a:t>Verklebe die 2 Teile</a:t>
+              <a:t>Ohne Markierung</a:t>
             </a:r>
             <a:endParaRPr lang="de-DE" dirty="0">
               <a:latin typeface="Calibri" panose="020F0502020204030204" pitchFamily="34" charset="0"/>
@@ -6546,42 +6510,6 @@
           </a:p>
         </p:txBody>
       </p:sp>
-      <p:cxnSp>
-        <p:nvCxnSpPr>
-          <p:cNvPr id="25" name="Gerade Verbindung mit Pfeil 24"/>
-          <p:cNvCxnSpPr/>
-          <p:nvPr/>
-        </p:nvCxnSpPr>
-        <p:spPr>
-          <a:xfrm flipH="1" flipV="1">
-            <a:off x="8782051" y="3571192"/>
-            <a:ext cx="330137" cy="852107"/>
-          </a:xfrm>
-          <a:prstGeom prst="straightConnector1">
-            <a:avLst/>
-          </a:prstGeom>
-          <a:ln w="41275">
-            <a:solidFill>
-              <a:schemeClr val="tx1"/>
-            </a:solidFill>
-            <a:tailEnd type="triangle"/>
-          </a:ln>
-        </p:spPr>
-        <p:style>
-          <a:lnRef idx="1">
-            <a:schemeClr val="accent1"/>
-          </a:lnRef>
-          <a:fillRef idx="0">
-            <a:schemeClr val="accent1"/>
-          </a:fillRef>
-          <a:effectRef idx="0">
-            <a:schemeClr val="accent1"/>
-          </a:effectRef>
-          <a:fontRef idx="minor">
-            <a:schemeClr val="tx1"/>
-          </a:fontRef>
-        </p:style>
-      </p:cxnSp>
       <p:cxnSp>
         <p:nvCxnSpPr>
           <p:cNvPr id="28" name="Gerade Verbindung mit Pfeil 27"/>
@@ -6914,6 +6842,125 @@
           </a:p>
         </p:txBody>
       </p:sp>
+      <p:sp>
+        <p:nvSpPr>
+          <p:cNvPr id="23" name="Rechteck 22"/>
+          <p:cNvSpPr/>
+          <p:nvPr/>
+        </p:nvSpPr>
+        <p:spPr>
+          <a:xfrm>
+            <a:off x="6758810" y="1974966"/>
+            <a:ext cx="1851790" cy="787652"/>
+          </a:xfrm>
+          <a:prstGeom prst="rect">
+            <a:avLst/>
+          </a:prstGeom>
+        </p:spPr>
+        <p:txBody>
+          <a:bodyPr wrap="none">
+            <a:spAutoFit/>
+          </a:bodyPr>
+          <a:lstStyle/>
+          <a:p>
+            <a:pPr marL="457200" algn="ctr">
+              <a:lnSpc>
+                <a:spcPct val="107000"/>
+              </a:lnSpc>
+              <a:spcAft>
+                <a:spcPts val="800"/>
+              </a:spcAft>
+            </a:pPr>
+            <a:r>
+              <a:rPr lang="de-DE" b="1" dirty="0" smtClean="0">
+                <a:solidFill>
+                  <a:srgbClr val="FF0000"/>
+                </a:solidFill>
+                <a:latin typeface="Arial" panose="020B0604020202020204" pitchFamily="34" charset="0"/>
+                <a:ea typeface="Calibri" panose="020F0502020204030204" pitchFamily="34" charset="0"/>
+                <a:cs typeface="Times New Roman" panose="02020603050405020304" pitchFamily="18" charset="0"/>
+              </a:rPr>
+              <a:t>Kein</a:t>
+            </a:r>
+          </a:p>
+          <a:p>
+            <a:pPr marL="457200" algn="ctr">
+              <a:lnSpc>
+                <a:spcPct val="107000"/>
+              </a:lnSpc>
+              <a:spcAft>
+                <a:spcPts val="800"/>
+              </a:spcAft>
+            </a:pPr>
+            <a:r>
+              <a:rPr lang="de-DE" b="1" dirty="0" smtClean="0">
+                <a:solidFill>
+                  <a:srgbClr val="FF0000"/>
+                </a:solidFill>
+                <a:latin typeface="Arial" panose="020B0604020202020204" pitchFamily="34" charset="0"/>
+                <a:ea typeface="Calibri" panose="020F0502020204030204" pitchFamily="34" charset="0"/>
+                <a:cs typeface="Times New Roman" panose="02020603050405020304" pitchFamily="18" charset="0"/>
+              </a:rPr>
+              <a:t>Kleberand</a:t>
+            </a:r>
+            <a:r>
+              <a:rPr lang="de-DE" b="1" dirty="0" smtClean="0">
+                <a:solidFill>
+                  <a:srgbClr val="FF0000"/>
+                </a:solidFill>
+                <a:latin typeface="Arial" panose="020B0604020202020204" pitchFamily="34" charset="0"/>
+                <a:ea typeface="Calibri" panose="020F0502020204030204" pitchFamily="34" charset="0"/>
+                <a:cs typeface="Times New Roman" panose="02020603050405020304" pitchFamily="18" charset="0"/>
+              </a:rPr>
+              <a:t>!</a:t>
+            </a:r>
+            <a:endParaRPr lang="de-DE" dirty="0">
+              <a:solidFill>
+                <a:srgbClr val="FF0000"/>
+              </a:solidFill>
+              <a:latin typeface="Calibri" panose="020F0502020204030204" pitchFamily="34" charset="0"/>
+              <a:ea typeface="Calibri" panose="020F0502020204030204" pitchFamily="34" charset="0"/>
+              <a:cs typeface="Times New Roman" panose="02020603050405020304" pitchFamily="18" charset="0"/>
+            </a:endParaRPr>
+          </a:p>
+        </p:txBody>
+      </p:sp>
+      <p:cxnSp>
+        <p:nvCxnSpPr>
+          <p:cNvPr id="26" name="Gerade Verbindung mit Pfeil 25"/>
+          <p:cNvCxnSpPr/>
+          <p:nvPr/>
+        </p:nvCxnSpPr>
+        <p:spPr>
+          <a:xfrm flipH="1">
+            <a:off x="6712120" y="2692177"/>
+            <a:ext cx="1016858" cy="424904"/>
+          </a:xfrm>
+          <a:prstGeom prst="straightConnector1">
+            <a:avLst/>
+          </a:prstGeom>
+          <a:ln w="41275">
+            <a:solidFill>
+              <a:schemeClr val="tx1"/>
+            </a:solidFill>
+            <a:tailEnd type="triangle"/>
+          </a:ln>
+        </p:spPr>
+        <p:style>
+          <a:lnRef idx="1">
+            <a:schemeClr val="accent1"/>
+          </a:lnRef>
+          <a:fillRef idx="0">
+            <a:schemeClr val="accent1"/>
+          </a:fillRef>
+          <a:effectRef idx="0">
+            <a:schemeClr val="accent1"/>
+          </a:effectRef>
+          <a:fontRef idx="minor">
+            <a:schemeClr val="tx1"/>
+          </a:fontRef>
+        </p:style>
+      </p:cxnSp>
     </p:spTree>
     <p:extLst>
       <p:ext uri="{BB962C8B-B14F-4D97-AF65-F5344CB8AC3E}">
@@ -7328,15 +7375,7 @@
                 <a:ea typeface="Calibri" panose="020F0502020204030204" pitchFamily="34" charset="0"/>
                 <a:cs typeface="Times New Roman" panose="02020603050405020304" pitchFamily="18" charset="0"/>
               </a:rPr>
-              <a:t>und verklebe die </a:t>
-            </a:r>
-            <a:r>
-              <a:rPr lang="de-DE" b="1" dirty="0" smtClean="0">
-                <a:latin typeface="Arial" panose="020B0604020202020204" pitchFamily="34" charset="0"/>
-                <a:ea typeface="Calibri" panose="020F0502020204030204" pitchFamily="34" charset="0"/>
-                <a:cs typeface="Times New Roman" panose="02020603050405020304" pitchFamily="18" charset="0"/>
-              </a:rPr>
-              <a:t>Teile auf </a:t>
+              <a:t>und verklebe die Teile auf </a:t>
             </a:r>
           </a:p>
           <a:p>
